--- a/ProjectDocs/Architecture.pptx
+++ b/ProjectDocs/Architecture.pptx
@@ -6,6 +6,8 @@
   </p:sldMasterIdLst>
   <p:sldIdLst>
     <p:sldId id="256" r:id="rId2"/>
+    <p:sldId id="258" r:id="rId3"/>
+    <p:sldId id="257" r:id="rId4"/>
   </p:sldIdLst>
   <p:sldSz cx="14400213" cy="8999538"/>
   <p:notesSz cx="6858000" cy="9144000"/>
@@ -104,6 +106,11 @@
       </a:defRPr>
     </a:lvl9pPr>
   </p:defaultTextStyle>
+  <p:extLst>
+    <p:ext uri="{EFAFB233-063F-42B5-8137-9DF3F51BA10A}">
+      <p15:sldGuideLst xmlns:p15="http://schemas.microsoft.com/office/powerpoint/2012/main"/>
+    </p:ext>
+  </p:extLst>
 </p:presentation>
 </file>
 
@@ -238,7 +245,7 @@
           <a:p>
             <a:fld id="{BB938E7F-C3BE-40FA-BE48-EB3019D14554}" type="datetimeFigureOut">
               <a:rPr lang="en-AU" smtClean="0"/>
-              <a:t>28/05/2026</a:t>
+              <a:t>25/08/2026</a:t>
             </a:fld>
             <a:endParaRPr lang="en-AU"/>
           </a:p>
@@ -408,7 +415,7 @@
           <a:p>
             <a:fld id="{BB938E7F-C3BE-40FA-BE48-EB3019D14554}" type="datetimeFigureOut">
               <a:rPr lang="en-AU" smtClean="0"/>
-              <a:t>28/05/2026</a:t>
+              <a:t>25/08/2026</a:t>
             </a:fld>
             <a:endParaRPr lang="en-AU"/>
           </a:p>
@@ -588,7 +595,7 @@
           <a:p>
             <a:fld id="{BB938E7F-C3BE-40FA-BE48-EB3019D14554}" type="datetimeFigureOut">
               <a:rPr lang="en-AU" smtClean="0"/>
-              <a:t>28/05/2026</a:t>
+              <a:t>25/08/2026</a:t>
             </a:fld>
             <a:endParaRPr lang="en-AU"/>
           </a:p>
@@ -758,7 +765,7 @@
           <a:p>
             <a:fld id="{BB938E7F-C3BE-40FA-BE48-EB3019D14554}" type="datetimeFigureOut">
               <a:rPr lang="en-AU" smtClean="0"/>
-              <a:t>28/05/2026</a:t>
+              <a:t>25/08/2026</a:t>
             </a:fld>
             <a:endParaRPr lang="en-AU"/>
           </a:p>
@@ -1004,7 +1011,7 @@
           <a:p>
             <a:fld id="{BB938E7F-C3BE-40FA-BE48-EB3019D14554}" type="datetimeFigureOut">
               <a:rPr lang="en-AU" smtClean="0"/>
-              <a:t>28/05/2026</a:t>
+              <a:t>25/08/2026</a:t>
             </a:fld>
             <a:endParaRPr lang="en-AU"/>
           </a:p>
@@ -1236,7 +1243,7 @@
           <a:p>
             <a:fld id="{BB938E7F-C3BE-40FA-BE48-EB3019D14554}" type="datetimeFigureOut">
               <a:rPr lang="en-AU" smtClean="0"/>
-              <a:t>28/05/2026</a:t>
+              <a:t>25/08/2026</a:t>
             </a:fld>
             <a:endParaRPr lang="en-AU"/>
           </a:p>
@@ -1603,7 +1610,7 @@
           <a:p>
             <a:fld id="{BB938E7F-C3BE-40FA-BE48-EB3019D14554}" type="datetimeFigureOut">
               <a:rPr lang="en-AU" smtClean="0"/>
-              <a:t>28/05/2026</a:t>
+              <a:t>25/08/2026</a:t>
             </a:fld>
             <a:endParaRPr lang="en-AU"/>
           </a:p>
@@ -1721,7 +1728,7 @@
           <a:p>
             <a:fld id="{BB938E7F-C3BE-40FA-BE48-EB3019D14554}" type="datetimeFigureOut">
               <a:rPr lang="en-AU" smtClean="0"/>
-              <a:t>28/05/2026</a:t>
+              <a:t>25/08/2026</a:t>
             </a:fld>
             <a:endParaRPr lang="en-AU"/>
           </a:p>
@@ -1816,7 +1823,7 @@
           <a:p>
             <a:fld id="{BB938E7F-C3BE-40FA-BE48-EB3019D14554}" type="datetimeFigureOut">
               <a:rPr lang="en-AU" smtClean="0"/>
-              <a:t>28/05/2026</a:t>
+              <a:t>25/08/2026</a:t>
             </a:fld>
             <a:endParaRPr lang="en-AU"/>
           </a:p>
@@ -2093,7 +2100,7 @@
           <a:p>
             <a:fld id="{BB938E7F-C3BE-40FA-BE48-EB3019D14554}" type="datetimeFigureOut">
               <a:rPr lang="en-AU" smtClean="0"/>
-              <a:t>28/05/2026</a:t>
+              <a:t>25/08/2026</a:t>
             </a:fld>
             <a:endParaRPr lang="en-AU"/>
           </a:p>
@@ -2350,7 +2357,7 @@
           <a:p>
             <a:fld id="{BB938E7F-C3BE-40FA-BE48-EB3019D14554}" type="datetimeFigureOut">
               <a:rPr lang="en-AU" smtClean="0"/>
-              <a:t>28/05/2026</a:t>
+              <a:t>25/08/2026</a:t>
             </a:fld>
             <a:endParaRPr lang="en-AU"/>
           </a:p>
@@ -2563,7 +2570,7 @@
           <a:p>
             <a:fld id="{BB938E7F-C3BE-40FA-BE48-EB3019D14554}" type="datetimeFigureOut">
               <a:rPr lang="en-AU" smtClean="0"/>
-              <a:t>28/05/2026</a:t>
+              <a:t>25/08/2026</a:t>
             </a:fld>
             <a:endParaRPr lang="en-AU"/>
           </a:p>
@@ -3853,7 +3860,6 @@
               <a:rPr lang="en-US" sz="1654" dirty="0" smtClean="0"/>
               <a:t>Fix Existing Issues (?)</a:t>
             </a:r>
-            <a:endParaRPr lang="en-US" sz="1654" dirty="0" smtClean="0"/>
           </a:p>
         </p:txBody>
       </p:sp>
@@ -3994,15 +4000,7 @@
           <a:p>
             <a:r>
               <a:rPr lang="en-US" sz="1654" dirty="0" smtClean="0"/>
-              <a:t>        Image, Questionnaire </a:t>
-            </a:r>
-            <a:r>
-              <a:rPr lang="en-US" sz="1654" dirty="0" smtClean="0"/>
-              <a:t>&amp; Profile </a:t>
-            </a:r>
-            <a:r>
-              <a:rPr lang="en-US" sz="1654" dirty="0" smtClean="0"/>
-              <a:t>based</a:t>
+              <a:t>        Image, Questionnaire &amp; Profile based</a:t>
             </a:r>
             <a:endParaRPr lang="en-US" sz="1654" dirty="0"/>
           </a:p>
@@ -4301,6 +4299,2863 @@
   <p:clrMapOvr>
     <a:masterClrMapping/>
   </p:clrMapOvr>
+  <p:timing>
+    <p:tnLst>
+      <p:par>
+        <p:cTn id="1" dur="indefinite" restart="never" nodeType="tmRoot"/>
+      </p:par>
+    </p:tnLst>
+  </p:timing>
+</p:sld>
+</file>
+
+<file path=ppt/slides/slide2.xml><?xml version="1.0" encoding="utf-8"?>
+<p:sld xmlns:a="http://schemas.openxmlformats.org/drawingml/2006/main" xmlns:r="http://schemas.openxmlformats.org/officeDocument/2006/relationships" xmlns:p="http://schemas.openxmlformats.org/presentationml/2006/main">
+  <p:cSld>
+    <p:spTree>
+      <p:nvGrpSpPr>
+        <p:cNvPr id="1" name=""/>
+        <p:cNvGrpSpPr/>
+        <p:nvPr/>
+      </p:nvGrpSpPr>
+      <p:grpSpPr>
+        <a:xfrm>
+          <a:off x="0" y="0"/>
+          <a:ext cx="0" cy="0"/>
+          <a:chOff x="0" y="0"/>
+          <a:chExt cx="0" cy="0"/>
+        </a:xfrm>
+      </p:grpSpPr>
+      <p:sp>
+        <p:nvSpPr>
+          <p:cNvPr id="2" name="Rectangle 1"/>
+          <p:cNvSpPr/>
+          <p:nvPr/>
+        </p:nvSpPr>
+        <p:spPr>
+          <a:xfrm>
+            <a:off x="2857500" y="266700"/>
+            <a:ext cx="10744200" cy="7600950"/>
+          </a:xfrm>
+          <a:prstGeom prst="rect">
+            <a:avLst/>
+          </a:prstGeom>
+          <a:solidFill>
+            <a:schemeClr val="accent6">
+              <a:lumMod val="20000"/>
+              <a:lumOff val="80000"/>
+            </a:schemeClr>
+          </a:solidFill>
+          <a:ln>
+            <a:solidFill>
+              <a:schemeClr val="tx1"/>
+            </a:solidFill>
+          </a:ln>
+        </p:spPr>
+        <p:style>
+          <a:lnRef idx="2">
+            <a:schemeClr val="accent1">
+              <a:shade val="50000"/>
+            </a:schemeClr>
+          </a:lnRef>
+          <a:fillRef idx="1">
+            <a:schemeClr val="accent1"/>
+          </a:fillRef>
+          <a:effectRef idx="0">
+            <a:schemeClr val="accent1"/>
+          </a:effectRef>
+          <a:fontRef idx="minor">
+            <a:schemeClr val="lt1"/>
+          </a:fontRef>
+        </p:style>
+        <p:txBody>
+          <a:bodyPr rtlCol="0" anchor="ctr"/>
+          <a:lstStyle/>
+          <a:p>
+            <a:pPr algn="ctr"/>
+            <a:endParaRPr lang="en-AU"/>
+          </a:p>
+        </p:txBody>
+      </p:sp>
+      <p:grpSp>
+        <p:nvGrpSpPr>
+          <p:cNvPr id="14" name="Group 13"/>
+          <p:cNvGrpSpPr/>
+          <p:nvPr/>
+        </p:nvGrpSpPr>
+        <p:grpSpPr>
+          <a:xfrm>
+            <a:off x="509588" y="1209675"/>
+            <a:ext cx="395288" cy="523875"/>
+            <a:chOff x="8634412" y="1219200"/>
+            <a:chExt cx="676275" cy="933450"/>
+          </a:xfrm>
+        </p:grpSpPr>
+        <p:sp>
+          <p:nvSpPr>
+            <p:cNvPr id="5" name="Smiley Face 4"/>
+            <p:cNvSpPr/>
+            <p:nvPr/>
+          </p:nvSpPr>
+          <p:spPr>
+            <a:xfrm>
+              <a:off x="8753475" y="1219200"/>
+              <a:ext cx="438150" cy="428625"/>
+            </a:xfrm>
+            <a:prstGeom prst="smileyFace">
+              <a:avLst/>
+            </a:prstGeom>
+          </p:spPr>
+          <p:style>
+            <a:lnRef idx="2">
+              <a:schemeClr val="accent1">
+                <a:shade val="50000"/>
+              </a:schemeClr>
+            </a:lnRef>
+            <a:fillRef idx="1">
+              <a:schemeClr val="accent1"/>
+            </a:fillRef>
+            <a:effectRef idx="0">
+              <a:schemeClr val="accent1"/>
+            </a:effectRef>
+            <a:fontRef idx="minor">
+              <a:schemeClr val="lt1"/>
+            </a:fontRef>
+          </p:style>
+          <p:txBody>
+            <a:bodyPr rtlCol="0" anchor="ctr"/>
+            <a:lstStyle/>
+            <a:p>
+              <a:pPr algn="ctr"/>
+              <a:endParaRPr lang="en-AU"/>
+            </a:p>
+          </p:txBody>
+        </p:sp>
+        <p:sp>
+          <p:nvSpPr>
+            <p:cNvPr id="12" name="Snip Same Side Corner Rectangle 11"/>
+            <p:cNvSpPr/>
+            <p:nvPr/>
+          </p:nvSpPr>
+          <p:spPr>
+            <a:xfrm>
+              <a:off x="8634412" y="1647825"/>
+              <a:ext cx="676275" cy="504825"/>
+            </a:xfrm>
+            <a:prstGeom prst="snip2SameRect">
+              <a:avLst/>
+            </a:prstGeom>
+          </p:spPr>
+          <p:style>
+            <a:lnRef idx="2">
+              <a:schemeClr val="accent1">
+                <a:shade val="50000"/>
+              </a:schemeClr>
+            </a:lnRef>
+            <a:fillRef idx="1">
+              <a:schemeClr val="accent1"/>
+            </a:fillRef>
+            <a:effectRef idx="0">
+              <a:schemeClr val="accent1"/>
+            </a:effectRef>
+            <a:fontRef idx="minor">
+              <a:schemeClr val="lt1"/>
+            </a:fontRef>
+          </p:style>
+          <p:txBody>
+            <a:bodyPr rtlCol="0" anchor="ctr"/>
+            <a:lstStyle/>
+            <a:p>
+              <a:pPr algn="ctr"/>
+              <a:endParaRPr lang="en-AU"/>
+            </a:p>
+          </p:txBody>
+        </p:sp>
+      </p:grpSp>
+      <p:sp>
+        <p:nvSpPr>
+          <p:cNvPr id="15" name="Down Arrow 14"/>
+          <p:cNvSpPr/>
+          <p:nvPr/>
+        </p:nvSpPr>
+        <p:spPr>
+          <a:xfrm rot="16200000">
+            <a:off x="1722182" y="461964"/>
+            <a:ext cx="552450" cy="2047875"/>
+          </a:xfrm>
+          <a:prstGeom prst="downArrow">
+            <a:avLst/>
+          </a:prstGeom>
+        </p:spPr>
+        <p:style>
+          <a:lnRef idx="2">
+            <a:schemeClr val="accent1">
+              <a:shade val="50000"/>
+            </a:schemeClr>
+          </a:lnRef>
+          <a:fillRef idx="1">
+            <a:schemeClr val="accent1"/>
+          </a:fillRef>
+          <a:effectRef idx="0">
+            <a:schemeClr val="accent1"/>
+          </a:effectRef>
+          <a:fontRef idx="minor">
+            <a:schemeClr val="lt1"/>
+          </a:fontRef>
+        </p:style>
+        <p:txBody>
+          <a:bodyPr rtlCol="0" anchor="ctr"/>
+          <a:lstStyle/>
+          <a:p>
+            <a:pPr algn="ctr"/>
+            <a:endParaRPr lang="en-AU" dirty="0"/>
+          </a:p>
+        </p:txBody>
+      </p:sp>
+      <p:sp>
+        <p:nvSpPr>
+          <p:cNvPr id="16" name="TextBox 15"/>
+          <p:cNvSpPr txBox="1"/>
+          <p:nvPr/>
+        </p:nvSpPr>
+        <p:spPr>
+          <a:xfrm>
+            <a:off x="1554581" y="1347401"/>
+            <a:ext cx="583621" cy="276999"/>
+          </a:xfrm>
+          <a:prstGeom prst="rect">
+            <a:avLst/>
+          </a:prstGeom>
+          <a:noFill/>
+        </p:spPr>
+        <p:txBody>
+          <a:bodyPr wrap="none" rtlCol="0">
+            <a:spAutoFit/>
+          </a:bodyPr>
+          <a:lstStyle/>
+          <a:p>
+            <a:r>
+              <a:rPr lang="en-US" sz="1200" dirty="0"/>
+              <a:t>L</a:t>
+            </a:r>
+            <a:r>
+              <a:rPr lang="en-US" sz="1200" dirty="0" smtClean="0"/>
+              <a:t>OGIN</a:t>
+            </a:r>
+            <a:endParaRPr lang="en-AU" sz="1200" dirty="0"/>
+          </a:p>
+        </p:txBody>
+      </p:sp>
+      <p:pic>
+        <p:nvPicPr>
+          <p:cNvPr id="26" name="Picture 25"/>
+          <p:cNvPicPr>
+            <a:picLocks noChangeAspect="1"/>
+          </p:cNvPicPr>
+          <p:nvPr/>
+        </p:nvPicPr>
+        <p:blipFill>
+          <a:blip r:embed="rId2">
+            <a:extLst>
+              <a:ext uri="{28A0092B-C50C-407E-A947-70E740481C1C}">
+                <a14:useLocalDpi xmlns:a14="http://schemas.microsoft.com/office/drawing/2010/main" val="0"/>
+              </a:ext>
+            </a:extLst>
+          </a:blip>
+          <a:stretch>
+            <a:fillRect/>
+          </a:stretch>
+        </p:blipFill>
+        <p:spPr>
+          <a:xfrm>
+            <a:off x="10688160" y="5901345"/>
+            <a:ext cx="1759620" cy="1759620"/>
+          </a:xfrm>
+          <a:prstGeom prst="rect">
+            <a:avLst/>
+          </a:prstGeom>
+        </p:spPr>
+      </p:pic>
+      <p:pic>
+        <p:nvPicPr>
+          <p:cNvPr id="28" name="Picture 27"/>
+          <p:cNvPicPr>
+            <a:picLocks noChangeAspect="1"/>
+          </p:cNvPicPr>
+          <p:nvPr/>
+        </p:nvPicPr>
+        <p:blipFill>
+          <a:blip r:embed="rId3" cstate="print">
+            <a:extLst>
+              <a:ext uri="{28A0092B-C50C-407E-A947-70E740481C1C}">
+                <a14:useLocalDpi xmlns:a14="http://schemas.microsoft.com/office/drawing/2010/main" val="0"/>
+              </a:ext>
+            </a:extLst>
+          </a:blip>
+          <a:stretch>
+            <a:fillRect/>
+          </a:stretch>
+        </p:blipFill>
+        <p:spPr>
+          <a:xfrm>
+            <a:off x="12373629" y="6287488"/>
+            <a:ext cx="1140105" cy="1140105"/>
+          </a:xfrm>
+          <a:prstGeom prst="rect">
+            <a:avLst/>
+          </a:prstGeom>
+        </p:spPr>
+      </p:pic>
+      <p:pic>
+        <p:nvPicPr>
+          <p:cNvPr id="29" name="Picture 28"/>
+          <p:cNvPicPr>
+            <a:picLocks noChangeAspect="1"/>
+          </p:cNvPicPr>
+          <p:nvPr/>
+        </p:nvPicPr>
+        <p:blipFill>
+          <a:blip r:embed="rId4" cstate="print">
+            <a:extLst>
+              <a:ext uri="{28A0092B-C50C-407E-A947-70E740481C1C}">
+                <a14:useLocalDpi xmlns:a14="http://schemas.microsoft.com/office/drawing/2010/main" val="0"/>
+              </a:ext>
+            </a:extLst>
+          </a:blip>
+          <a:stretch>
+            <a:fillRect/>
+          </a:stretch>
+        </p:blipFill>
+        <p:spPr>
+          <a:xfrm rot="13345969">
+            <a:off x="12152614" y="6052880"/>
+            <a:ext cx="793513" cy="887002"/>
+          </a:xfrm>
+          <a:prstGeom prst="rect">
+            <a:avLst/>
+          </a:prstGeom>
+        </p:spPr>
+      </p:pic>
+      <p:sp>
+        <p:nvSpPr>
+          <p:cNvPr id="41" name="Rectangle 40"/>
+          <p:cNvSpPr/>
+          <p:nvPr/>
+        </p:nvSpPr>
+        <p:spPr>
+          <a:xfrm>
+            <a:off x="3072978" y="587002"/>
+            <a:ext cx="2816480" cy="2009775"/>
+          </a:xfrm>
+          <a:prstGeom prst="rect">
+            <a:avLst/>
+          </a:prstGeom>
+          <a:solidFill>
+            <a:schemeClr val="accent1">
+              <a:lumMod val="20000"/>
+              <a:lumOff val="80000"/>
+            </a:schemeClr>
+          </a:solidFill>
+        </p:spPr>
+        <p:style>
+          <a:lnRef idx="2">
+            <a:schemeClr val="accent1">
+              <a:shade val="50000"/>
+            </a:schemeClr>
+          </a:lnRef>
+          <a:fillRef idx="1">
+            <a:schemeClr val="accent1"/>
+          </a:fillRef>
+          <a:effectRef idx="0">
+            <a:schemeClr val="accent1"/>
+          </a:effectRef>
+          <a:fontRef idx="minor">
+            <a:schemeClr val="lt1"/>
+          </a:fontRef>
+        </p:style>
+        <p:txBody>
+          <a:bodyPr rtlCol="0" anchor="ctr"/>
+          <a:lstStyle/>
+          <a:p>
+            <a:pPr algn="ctr"/>
+            <a:endParaRPr lang="en-AU"/>
+          </a:p>
+        </p:txBody>
+      </p:sp>
+      <p:grpSp>
+        <p:nvGrpSpPr>
+          <p:cNvPr id="20" name="Group 19"/>
+          <p:cNvGrpSpPr/>
+          <p:nvPr/>
+        </p:nvGrpSpPr>
+        <p:grpSpPr>
+          <a:xfrm>
+            <a:off x="3196589" y="1140839"/>
+            <a:ext cx="568104" cy="690121"/>
+            <a:chOff x="3337214" y="1450230"/>
+            <a:chExt cx="568104" cy="690121"/>
+          </a:xfrm>
+        </p:grpSpPr>
+        <p:sp>
+          <p:nvSpPr>
+            <p:cNvPr id="17" name="Frame 16"/>
+            <p:cNvSpPr/>
+            <p:nvPr/>
+          </p:nvSpPr>
+          <p:spPr>
+            <a:xfrm>
+              <a:off x="3337214" y="1450230"/>
+              <a:ext cx="568104" cy="690121"/>
+            </a:xfrm>
+            <a:prstGeom prst="frame">
+              <a:avLst/>
+            </a:prstGeom>
+          </p:spPr>
+          <p:style>
+            <a:lnRef idx="2">
+              <a:schemeClr val="accent1">
+                <a:shade val="50000"/>
+              </a:schemeClr>
+            </a:lnRef>
+            <a:fillRef idx="1">
+              <a:schemeClr val="accent1"/>
+            </a:fillRef>
+            <a:effectRef idx="0">
+              <a:schemeClr val="accent1"/>
+            </a:effectRef>
+            <a:fontRef idx="minor">
+              <a:schemeClr val="lt1"/>
+            </a:fontRef>
+          </p:style>
+          <p:txBody>
+            <a:bodyPr rtlCol="0" anchor="ctr"/>
+            <a:lstStyle/>
+            <a:p>
+              <a:pPr algn="ctr"/>
+              <a:endParaRPr lang="en-AU">
+                <a:solidFill>
+                  <a:schemeClr val="tx1"/>
+                </a:solidFill>
+              </a:endParaRPr>
+            </a:p>
+          </p:txBody>
+        </p:sp>
+        <p:sp>
+          <p:nvSpPr>
+            <p:cNvPr id="19" name="Smiley Face 18"/>
+            <p:cNvSpPr/>
+            <p:nvPr/>
+          </p:nvSpPr>
+          <p:spPr>
+            <a:xfrm>
+              <a:off x="3476950" y="1577604"/>
+              <a:ext cx="276225" cy="295273"/>
+            </a:xfrm>
+            <a:prstGeom prst="smileyFace">
+              <a:avLst/>
+            </a:prstGeom>
+          </p:spPr>
+          <p:style>
+            <a:lnRef idx="2">
+              <a:schemeClr val="accent1">
+                <a:shade val="50000"/>
+              </a:schemeClr>
+            </a:lnRef>
+            <a:fillRef idx="1">
+              <a:schemeClr val="accent1"/>
+            </a:fillRef>
+            <a:effectRef idx="0">
+              <a:schemeClr val="accent1"/>
+            </a:effectRef>
+            <a:fontRef idx="minor">
+              <a:schemeClr val="lt1"/>
+            </a:fontRef>
+          </p:style>
+          <p:txBody>
+            <a:bodyPr rtlCol="0" anchor="ctr"/>
+            <a:lstStyle/>
+            <a:p>
+              <a:pPr algn="ctr"/>
+              <a:endParaRPr lang="en-AU"/>
+            </a:p>
+          </p:txBody>
+        </p:sp>
+        <p:sp>
+          <p:nvSpPr>
+            <p:cNvPr id="39" name="TextBox 38"/>
+            <p:cNvSpPr txBox="1"/>
+            <p:nvPr/>
+          </p:nvSpPr>
+          <p:spPr>
+            <a:xfrm>
+              <a:off x="3337214" y="1863352"/>
+              <a:ext cx="568104" cy="276999"/>
+            </a:xfrm>
+            <a:prstGeom prst="rect">
+              <a:avLst/>
+            </a:prstGeom>
+            <a:noFill/>
+          </p:spPr>
+          <p:txBody>
+            <a:bodyPr wrap="none" rtlCol="0">
+              <a:spAutoFit/>
+            </a:bodyPr>
+            <a:lstStyle/>
+            <a:p>
+              <a:r>
+                <a:rPr lang="en-US" sz="1200" dirty="0" smtClean="0"/>
+                <a:t>Image</a:t>
+              </a:r>
+              <a:endParaRPr lang="en-AU" sz="1200" dirty="0"/>
+            </a:p>
+          </p:txBody>
+        </p:sp>
+      </p:grpSp>
+      <p:sp>
+        <p:nvSpPr>
+          <p:cNvPr id="22" name="Folded Corner 21"/>
+          <p:cNvSpPr/>
+          <p:nvPr/>
+        </p:nvSpPr>
+        <p:spPr>
+          <a:xfrm>
+            <a:off x="4032764" y="1140839"/>
+            <a:ext cx="1091687" cy="690121"/>
+          </a:xfrm>
+          <a:prstGeom prst="foldedCorner">
+            <a:avLst/>
+          </a:prstGeom>
+        </p:spPr>
+        <p:style>
+          <a:lnRef idx="2">
+            <a:schemeClr val="accent1">
+              <a:shade val="50000"/>
+            </a:schemeClr>
+          </a:lnRef>
+          <a:fillRef idx="1">
+            <a:schemeClr val="accent1"/>
+          </a:fillRef>
+          <a:effectRef idx="0">
+            <a:schemeClr val="accent1"/>
+          </a:effectRef>
+          <a:fontRef idx="minor">
+            <a:schemeClr val="lt1"/>
+          </a:fontRef>
+        </p:style>
+        <p:txBody>
+          <a:bodyPr rtlCol="0" anchor="ctr"/>
+          <a:lstStyle/>
+          <a:p>
+            <a:pPr algn="ctr"/>
+            <a:r>
+              <a:rPr lang="en-US" sz="1200" dirty="0" smtClean="0">
+                <a:solidFill>
+                  <a:schemeClr val="tx1"/>
+                </a:solidFill>
+              </a:rPr>
+              <a:t>Questionnaire</a:t>
+            </a:r>
+            <a:endParaRPr lang="en-AU" sz="1200" dirty="0">
+              <a:solidFill>
+                <a:schemeClr val="tx1"/>
+              </a:solidFill>
+            </a:endParaRPr>
+          </a:p>
+        </p:txBody>
+      </p:sp>
+      <p:sp>
+        <p:nvSpPr>
+          <p:cNvPr id="40" name="Left Arrow 39"/>
+          <p:cNvSpPr/>
+          <p:nvPr/>
+        </p:nvSpPr>
+        <p:spPr>
+          <a:xfrm rot="12961895">
+            <a:off x="4411449" y="3721509"/>
+            <a:ext cx="8335650" cy="477190"/>
+          </a:xfrm>
+          <a:prstGeom prst="leftArrow">
+            <a:avLst/>
+          </a:prstGeom>
+        </p:spPr>
+        <p:style>
+          <a:lnRef idx="2">
+            <a:schemeClr val="accent1">
+              <a:shade val="50000"/>
+            </a:schemeClr>
+          </a:lnRef>
+          <a:fillRef idx="1">
+            <a:schemeClr val="accent1"/>
+          </a:fillRef>
+          <a:effectRef idx="0">
+            <a:schemeClr val="accent1"/>
+          </a:effectRef>
+          <a:fontRef idx="minor">
+            <a:schemeClr val="lt1"/>
+          </a:fontRef>
+        </p:style>
+        <p:txBody>
+          <a:bodyPr rtlCol="0" anchor="ctr"/>
+          <a:lstStyle/>
+          <a:p>
+            <a:pPr algn="ctr"/>
+            <a:endParaRPr lang="en-AU"/>
+          </a:p>
+        </p:txBody>
+      </p:sp>
+      <p:sp>
+        <p:nvSpPr>
+          <p:cNvPr id="24" name="Rectangle 23"/>
+          <p:cNvSpPr/>
+          <p:nvPr/>
+        </p:nvSpPr>
+        <p:spPr>
+          <a:xfrm>
+            <a:off x="7066465" y="3285346"/>
+            <a:ext cx="1953710" cy="486554"/>
+          </a:xfrm>
+          <a:prstGeom prst="rect">
+            <a:avLst/>
+          </a:prstGeom>
+          <a:solidFill>
+            <a:schemeClr val="accent1">
+              <a:lumMod val="20000"/>
+              <a:lumOff val="80000"/>
+            </a:schemeClr>
+          </a:solidFill>
+        </p:spPr>
+        <p:style>
+          <a:lnRef idx="2">
+            <a:schemeClr val="accent1">
+              <a:shade val="50000"/>
+            </a:schemeClr>
+          </a:lnRef>
+          <a:fillRef idx="1">
+            <a:schemeClr val="accent1"/>
+          </a:fillRef>
+          <a:effectRef idx="0">
+            <a:schemeClr val="accent1"/>
+          </a:effectRef>
+          <a:fontRef idx="minor">
+            <a:schemeClr val="lt1"/>
+          </a:fontRef>
+        </p:style>
+        <p:txBody>
+          <a:bodyPr rtlCol="0" anchor="ctr"/>
+          <a:lstStyle/>
+          <a:p>
+            <a:r>
+              <a:rPr lang="en-US" sz="1200" dirty="0" smtClean="0">
+                <a:solidFill>
+                  <a:schemeClr val="tx1"/>
+                </a:solidFill>
+              </a:rPr>
+              <a:t>Concatenate 2 or 3 answers to questionnaire questions</a:t>
+            </a:r>
+            <a:endParaRPr lang="en-AU" sz="1200" dirty="0">
+              <a:solidFill>
+                <a:schemeClr val="tx1"/>
+              </a:solidFill>
+            </a:endParaRPr>
+          </a:p>
+        </p:txBody>
+      </p:sp>
+      <p:grpSp>
+        <p:nvGrpSpPr>
+          <p:cNvPr id="25" name="Group 24"/>
+          <p:cNvGrpSpPr/>
+          <p:nvPr/>
+        </p:nvGrpSpPr>
+        <p:grpSpPr>
+          <a:xfrm>
+            <a:off x="11151646" y="5395834"/>
+            <a:ext cx="2047875" cy="505511"/>
+            <a:chOff x="4200525" y="2438400"/>
+            <a:chExt cx="2047875" cy="2892268"/>
+          </a:xfrm>
+        </p:grpSpPr>
+        <p:sp>
+          <p:nvSpPr>
+            <p:cNvPr id="27" name="Folded Corner 26"/>
+            <p:cNvSpPr/>
+            <p:nvPr/>
+          </p:nvSpPr>
+          <p:spPr>
+            <a:xfrm>
+              <a:off x="4200525" y="2438400"/>
+              <a:ext cx="2047875" cy="2892268"/>
+            </a:xfrm>
+            <a:prstGeom prst="foldedCorner">
+              <a:avLst/>
+            </a:prstGeom>
+            <a:solidFill>
+              <a:schemeClr val="accent1">
+                <a:lumMod val="20000"/>
+                <a:lumOff val="80000"/>
+              </a:schemeClr>
+            </a:solidFill>
+          </p:spPr>
+          <p:style>
+            <a:lnRef idx="2">
+              <a:schemeClr val="accent1">
+                <a:shade val="50000"/>
+              </a:schemeClr>
+            </a:lnRef>
+            <a:fillRef idx="1">
+              <a:schemeClr val="accent1"/>
+            </a:fillRef>
+            <a:effectRef idx="0">
+              <a:schemeClr val="accent1"/>
+            </a:effectRef>
+            <a:fontRef idx="minor">
+              <a:schemeClr val="lt1"/>
+            </a:fontRef>
+          </p:style>
+          <p:txBody>
+            <a:bodyPr rtlCol="0" anchor="ctr"/>
+            <a:lstStyle/>
+            <a:p>
+              <a:pPr algn="ctr"/>
+              <a:endParaRPr lang="en-AU" dirty="0"/>
+            </a:p>
+          </p:txBody>
+        </p:sp>
+        <p:sp>
+          <p:nvSpPr>
+            <p:cNvPr id="31" name="TextBox 30"/>
+            <p:cNvSpPr txBox="1"/>
+            <p:nvPr/>
+          </p:nvSpPr>
+          <p:spPr>
+            <a:xfrm>
+              <a:off x="4285895" y="2617109"/>
+              <a:ext cx="1951496" cy="560178"/>
+            </a:xfrm>
+            <a:prstGeom prst="rect">
+              <a:avLst/>
+            </a:prstGeom>
+            <a:noFill/>
+          </p:spPr>
+          <p:txBody>
+            <a:bodyPr wrap="none" rtlCol="0">
+              <a:spAutoFit/>
+            </a:bodyPr>
+            <a:lstStyle/>
+            <a:p>
+              <a:r>
+                <a:rPr lang="en-US" sz="1200" dirty="0" smtClean="0"/>
+                <a:t>All Skin Concerns:</a:t>
+              </a:r>
+            </a:p>
+            <a:p>
+              <a:r>
+                <a:rPr lang="en-US" sz="1200" dirty="0" smtClean="0"/>
+                <a:t>Serum + Vitamin C + 8 hours</a:t>
+              </a:r>
+            </a:p>
+          </p:txBody>
+        </p:sp>
+      </p:grpSp>
+      <p:pic>
+        <p:nvPicPr>
+          <p:cNvPr id="32" name="Picture 31"/>
+          <p:cNvPicPr>
+            <a:picLocks noChangeAspect="1"/>
+          </p:cNvPicPr>
+          <p:nvPr/>
+        </p:nvPicPr>
+        <p:blipFill rotWithShape="1">
+          <a:blip r:embed="rId5" cstate="print">
+            <a:extLst>
+              <a:ext uri="{28A0092B-C50C-407E-A947-70E740481C1C}">
+                <a14:useLocalDpi xmlns:a14="http://schemas.microsoft.com/office/drawing/2010/main" val="0"/>
+              </a:ext>
+            </a:extLst>
+          </a:blip>
+          <a:srcRect t="28812" b="26164"/>
+          <a:stretch/>
+        </p:blipFill>
+        <p:spPr>
+          <a:xfrm>
+            <a:off x="7751114" y="665780"/>
+            <a:ext cx="1655279" cy="356555"/>
+          </a:xfrm>
+          <a:prstGeom prst="rect">
+            <a:avLst/>
+          </a:prstGeom>
+        </p:spPr>
+      </p:pic>
+    </p:spTree>
+    <p:extLst>
+      <p:ext uri="{BB962C8B-B14F-4D97-AF65-F5344CB8AC3E}">
+        <p14:creationId xmlns:p14="http://schemas.microsoft.com/office/powerpoint/2010/main" val="2782180473"/>
+      </p:ext>
+    </p:extLst>
+  </p:cSld>
+  <p:clrMapOvr>
+    <a:masterClrMapping/>
+  </p:clrMapOvr>
+  <p:timing>
+    <p:tnLst>
+      <p:par>
+        <p:cTn id="1" dur="indefinite" restart="never" nodeType="tmRoot"/>
+      </p:par>
+    </p:tnLst>
+  </p:timing>
+</p:sld>
+</file>
+
+<file path=ppt/slides/slide3.xml><?xml version="1.0" encoding="utf-8"?>
+<p:sld xmlns:a="http://schemas.openxmlformats.org/drawingml/2006/main" xmlns:r="http://schemas.openxmlformats.org/officeDocument/2006/relationships" xmlns:p="http://schemas.openxmlformats.org/presentationml/2006/main">
+  <p:cSld>
+    <p:spTree>
+      <p:nvGrpSpPr>
+        <p:cNvPr id="1" name=""/>
+        <p:cNvGrpSpPr/>
+        <p:nvPr/>
+      </p:nvGrpSpPr>
+      <p:grpSpPr>
+        <a:xfrm>
+          <a:off x="0" y="0"/>
+          <a:ext cx="0" cy="0"/>
+          <a:chOff x="0" y="0"/>
+          <a:chExt cx="0" cy="0"/>
+        </a:xfrm>
+      </p:grpSpPr>
+      <p:grpSp>
+        <p:nvGrpSpPr>
+          <p:cNvPr id="3" name="Group 2"/>
+          <p:cNvGrpSpPr/>
+          <p:nvPr/>
+        </p:nvGrpSpPr>
+        <p:grpSpPr>
+          <a:xfrm>
+            <a:off x="2533650" y="209550"/>
+            <a:ext cx="11068050" cy="7600950"/>
+            <a:chOff x="942975" y="419100"/>
+            <a:chExt cx="4981575" cy="7600950"/>
+          </a:xfrm>
+        </p:grpSpPr>
+        <p:sp>
+          <p:nvSpPr>
+            <p:cNvPr id="2" name="Rectangle 1"/>
+            <p:cNvSpPr/>
+            <p:nvPr/>
+          </p:nvSpPr>
+          <p:spPr>
+            <a:xfrm>
+              <a:off x="942975" y="419100"/>
+              <a:ext cx="4981575" cy="7600950"/>
+            </a:xfrm>
+            <a:prstGeom prst="rect">
+              <a:avLst/>
+            </a:prstGeom>
+            <a:solidFill>
+              <a:schemeClr val="accent6">
+                <a:lumMod val="20000"/>
+                <a:lumOff val="80000"/>
+              </a:schemeClr>
+            </a:solidFill>
+            <a:ln>
+              <a:solidFill>
+                <a:schemeClr val="tx1"/>
+              </a:solidFill>
+            </a:ln>
+          </p:spPr>
+          <p:style>
+            <a:lnRef idx="2">
+              <a:schemeClr val="accent1">
+                <a:shade val="50000"/>
+              </a:schemeClr>
+            </a:lnRef>
+            <a:fillRef idx="1">
+              <a:schemeClr val="accent1"/>
+            </a:fillRef>
+            <a:effectRef idx="0">
+              <a:schemeClr val="accent1"/>
+            </a:effectRef>
+            <a:fontRef idx="minor">
+              <a:schemeClr val="lt1"/>
+            </a:fontRef>
+          </p:style>
+          <p:txBody>
+            <a:bodyPr rtlCol="0" anchor="ctr"/>
+            <a:lstStyle/>
+            <a:p>
+              <a:pPr algn="ctr"/>
+              <a:endParaRPr lang="en-AU" dirty="0"/>
+            </a:p>
+          </p:txBody>
+        </p:sp>
+        <p:pic>
+          <p:nvPicPr>
+            <p:cNvPr id="30" name="Picture 29"/>
+            <p:cNvPicPr>
+              <a:picLocks noChangeAspect="1"/>
+            </p:cNvPicPr>
+            <p:nvPr/>
+          </p:nvPicPr>
+          <p:blipFill rotWithShape="1">
+            <a:blip r:embed="rId2" cstate="print">
+              <a:extLst>
+                <a:ext uri="{28A0092B-C50C-407E-A947-70E740481C1C}">
+                  <a14:useLocalDpi xmlns:a14="http://schemas.microsoft.com/office/drawing/2010/main" val="0"/>
+                </a:ext>
+              </a:extLst>
+            </a:blip>
+            <a:srcRect t="28812" b="26164"/>
+            <a:stretch/>
+          </p:blipFill>
+          <p:spPr>
+            <a:xfrm>
+              <a:off x="3291283" y="875330"/>
+              <a:ext cx="745018" cy="356555"/>
+            </a:xfrm>
+            <a:prstGeom prst="rect">
+              <a:avLst/>
+            </a:prstGeom>
+          </p:spPr>
+        </p:pic>
+      </p:grpSp>
+      <p:grpSp>
+        <p:nvGrpSpPr>
+          <p:cNvPr id="14" name="Group 13"/>
+          <p:cNvGrpSpPr/>
+          <p:nvPr/>
+        </p:nvGrpSpPr>
+        <p:grpSpPr>
+          <a:xfrm>
+            <a:off x="509588" y="1209675"/>
+            <a:ext cx="395288" cy="523875"/>
+            <a:chOff x="8634412" y="1219200"/>
+            <a:chExt cx="676275" cy="933450"/>
+          </a:xfrm>
+        </p:grpSpPr>
+        <p:sp>
+          <p:nvSpPr>
+            <p:cNvPr id="5" name="Smiley Face 4"/>
+            <p:cNvSpPr/>
+            <p:nvPr/>
+          </p:nvSpPr>
+          <p:spPr>
+            <a:xfrm>
+              <a:off x="8753475" y="1219200"/>
+              <a:ext cx="438150" cy="428625"/>
+            </a:xfrm>
+            <a:prstGeom prst="smileyFace">
+              <a:avLst/>
+            </a:prstGeom>
+          </p:spPr>
+          <p:style>
+            <a:lnRef idx="2">
+              <a:schemeClr val="accent1">
+                <a:shade val="50000"/>
+              </a:schemeClr>
+            </a:lnRef>
+            <a:fillRef idx="1">
+              <a:schemeClr val="accent1"/>
+            </a:fillRef>
+            <a:effectRef idx="0">
+              <a:schemeClr val="accent1"/>
+            </a:effectRef>
+            <a:fontRef idx="minor">
+              <a:schemeClr val="lt1"/>
+            </a:fontRef>
+          </p:style>
+          <p:txBody>
+            <a:bodyPr rtlCol="0" anchor="ctr"/>
+            <a:lstStyle/>
+            <a:p>
+              <a:pPr algn="ctr"/>
+              <a:endParaRPr lang="en-AU"/>
+            </a:p>
+          </p:txBody>
+        </p:sp>
+        <p:sp>
+          <p:nvSpPr>
+            <p:cNvPr id="12" name="Snip Same Side Corner Rectangle 11"/>
+            <p:cNvSpPr/>
+            <p:nvPr/>
+          </p:nvSpPr>
+          <p:spPr>
+            <a:xfrm>
+              <a:off x="8634412" y="1647825"/>
+              <a:ext cx="676275" cy="504825"/>
+            </a:xfrm>
+            <a:prstGeom prst="snip2SameRect">
+              <a:avLst/>
+            </a:prstGeom>
+          </p:spPr>
+          <p:style>
+            <a:lnRef idx="2">
+              <a:schemeClr val="accent1">
+                <a:shade val="50000"/>
+              </a:schemeClr>
+            </a:lnRef>
+            <a:fillRef idx="1">
+              <a:schemeClr val="accent1"/>
+            </a:fillRef>
+            <a:effectRef idx="0">
+              <a:schemeClr val="accent1"/>
+            </a:effectRef>
+            <a:fontRef idx="minor">
+              <a:schemeClr val="lt1"/>
+            </a:fontRef>
+          </p:style>
+          <p:txBody>
+            <a:bodyPr rtlCol="0" anchor="ctr"/>
+            <a:lstStyle/>
+            <a:p>
+              <a:pPr algn="ctr"/>
+              <a:endParaRPr lang="en-AU"/>
+            </a:p>
+          </p:txBody>
+        </p:sp>
+      </p:grpSp>
+      <p:sp>
+        <p:nvSpPr>
+          <p:cNvPr id="15" name="Down Arrow 14"/>
+          <p:cNvSpPr/>
+          <p:nvPr/>
+        </p:nvSpPr>
+        <p:spPr>
+          <a:xfrm rot="16200000">
+            <a:off x="1722182" y="461964"/>
+            <a:ext cx="552450" cy="2047875"/>
+          </a:xfrm>
+          <a:prstGeom prst="downArrow">
+            <a:avLst/>
+          </a:prstGeom>
+        </p:spPr>
+        <p:style>
+          <a:lnRef idx="2">
+            <a:schemeClr val="accent1">
+              <a:shade val="50000"/>
+            </a:schemeClr>
+          </a:lnRef>
+          <a:fillRef idx="1">
+            <a:schemeClr val="accent1"/>
+          </a:fillRef>
+          <a:effectRef idx="0">
+            <a:schemeClr val="accent1"/>
+          </a:effectRef>
+          <a:fontRef idx="minor">
+            <a:schemeClr val="lt1"/>
+          </a:fontRef>
+        </p:style>
+        <p:txBody>
+          <a:bodyPr rtlCol="0" anchor="ctr"/>
+          <a:lstStyle/>
+          <a:p>
+            <a:pPr algn="ctr"/>
+            <a:endParaRPr lang="en-AU" dirty="0"/>
+          </a:p>
+        </p:txBody>
+      </p:sp>
+      <p:sp>
+        <p:nvSpPr>
+          <p:cNvPr id="16" name="TextBox 15"/>
+          <p:cNvSpPr txBox="1"/>
+          <p:nvPr/>
+        </p:nvSpPr>
+        <p:spPr>
+          <a:xfrm>
+            <a:off x="1554581" y="1347401"/>
+            <a:ext cx="583621" cy="276999"/>
+          </a:xfrm>
+          <a:prstGeom prst="rect">
+            <a:avLst/>
+          </a:prstGeom>
+          <a:noFill/>
+        </p:spPr>
+        <p:txBody>
+          <a:bodyPr wrap="none" rtlCol="0">
+            <a:spAutoFit/>
+          </a:bodyPr>
+          <a:lstStyle/>
+          <a:p>
+            <a:r>
+              <a:rPr lang="en-US" sz="1200" dirty="0"/>
+              <a:t>L</a:t>
+            </a:r>
+            <a:r>
+              <a:rPr lang="en-US" sz="1200" dirty="0" smtClean="0"/>
+              <a:t>OGIN</a:t>
+            </a:r>
+            <a:endParaRPr lang="en-AU" sz="1200" dirty="0"/>
+          </a:p>
+        </p:txBody>
+      </p:sp>
+      <p:pic>
+        <p:nvPicPr>
+          <p:cNvPr id="26" name="Picture 25"/>
+          <p:cNvPicPr>
+            <a:picLocks noChangeAspect="1"/>
+          </p:cNvPicPr>
+          <p:nvPr/>
+        </p:nvPicPr>
+        <p:blipFill>
+          <a:blip r:embed="rId3">
+            <a:extLst>
+              <a:ext uri="{28A0092B-C50C-407E-A947-70E740481C1C}">
+                <a14:useLocalDpi xmlns:a14="http://schemas.microsoft.com/office/drawing/2010/main" val="0"/>
+              </a:ext>
+            </a:extLst>
+          </a:blip>
+          <a:stretch>
+            <a:fillRect/>
+          </a:stretch>
+        </p:blipFill>
+        <p:spPr>
+          <a:xfrm>
+            <a:off x="10688160" y="5901345"/>
+            <a:ext cx="1759620" cy="1759620"/>
+          </a:xfrm>
+          <a:prstGeom prst="rect">
+            <a:avLst/>
+          </a:prstGeom>
+        </p:spPr>
+      </p:pic>
+      <p:pic>
+        <p:nvPicPr>
+          <p:cNvPr id="28" name="Picture 27"/>
+          <p:cNvPicPr>
+            <a:picLocks noChangeAspect="1"/>
+          </p:cNvPicPr>
+          <p:nvPr/>
+        </p:nvPicPr>
+        <p:blipFill>
+          <a:blip r:embed="rId4" cstate="print">
+            <a:extLst>
+              <a:ext uri="{28A0092B-C50C-407E-A947-70E740481C1C}">
+                <a14:useLocalDpi xmlns:a14="http://schemas.microsoft.com/office/drawing/2010/main" val="0"/>
+              </a:ext>
+            </a:extLst>
+          </a:blip>
+          <a:stretch>
+            <a:fillRect/>
+          </a:stretch>
+        </p:blipFill>
+        <p:spPr>
+          <a:xfrm>
+            <a:off x="12373629" y="6287488"/>
+            <a:ext cx="1140105" cy="1140105"/>
+          </a:xfrm>
+          <a:prstGeom prst="rect">
+            <a:avLst/>
+          </a:prstGeom>
+        </p:spPr>
+      </p:pic>
+      <p:pic>
+        <p:nvPicPr>
+          <p:cNvPr id="29" name="Picture 28"/>
+          <p:cNvPicPr>
+            <a:picLocks noChangeAspect="1"/>
+          </p:cNvPicPr>
+          <p:nvPr/>
+        </p:nvPicPr>
+        <p:blipFill>
+          <a:blip r:embed="rId5" cstate="print">
+            <a:extLst>
+              <a:ext uri="{28A0092B-C50C-407E-A947-70E740481C1C}">
+                <a14:useLocalDpi xmlns:a14="http://schemas.microsoft.com/office/drawing/2010/main" val="0"/>
+              </a:ext>
+            </a:extLst>
+          </a:blip>
+          <a:stretch>
+            <a:fillRect/>
+          </a:stretch>
+        </p:blipFill>
+        <p:spPr>
+          <a:xfrm rot="13345969">
+            <a:off x="12152614" y="6052880"/>
+            <a:ext cx="793513" cy="887002"/>
+          </a:xfrm>
+          <a:prstGeom prst="rect">
+            <a:avLst/>
+          </a:prstGeom>
+        </p:spPr>
+      </p:pic>
+      <p:grpSp>
+        <p:nvGrpSpPr>
+          <p:cNvPr id="37" name="Group 36"/>
+          <p:cNvGrpSpPr/>
+          <p:nvPr/>
+        </p:nvGrpSpPr>
+        <p:grpSpPr>
+          <a:xfrm>
+            <a:off x="8048433" y="5103712"/>
+            <a:ext cx="2047875" cy="2404365"/>
+            <a:chOff x="4200525" y="2413236"/>
+            <a:chExt cx="2047875" cy="2917432"/>
+          </a:xfrm>
+        </p:grpSpPr>
+        <p:sp>
+          <p:nvSpPr>
+            <p:cNvPr id="33" name="Folded Corner 32"/>
+            <p:cNvSpPr/>
+            <p:nvPr/>
+          </p:nvSpPr>
+          <p:spPr>
+            <a:xfrm>
+              <a:off x="4200525" y="2438400"/>
+              <a:ext cx="2047875" cy="2892268"/>
+            </a:xfrm>
+            <a:prstGeom prst="foldedCorner">
+              <a:avLst/>
+            </a:prstGeom>
+            <a:solidFill>
+              <a:schemeClr val="accent1">
+                <a:lumMod val="20000"/>
+                <a:lumOff val="80000"/>
+              </a:schemeClr>
+            </a:solidFill>
+          </p:spPr>
+          <p:style>
+            <a:lnRef idx="2">
+              <a:schemeClr val="accent1">
+                <a:shade val="50000"/>
+              </a:schemeClr>
+            </a:lnRef>
+            <a:fillRef idx="1">
+              <a:schemeClr val="accent1"/>
+            </a:fillRef>
+            <a:effectRef idx="0">
+              <a:schemeClr val="accent1"/>
+            </a:effectRef>
+            <a:fontRef idx="minor">
+              <a:schemeClr val="lt1"/>
+            </a:fontRef>
+          </p:style>
+          <p:txBody>
+            <a:bodyPr rtlCol="0" anchor="ctr"/>
+            <a:lstStyle/>
+            <a:p>
+              <a:pPr algn="ctr"/>
+              <a:endParaRPr lang="en-AU" dirty="0"/>
+            </a:p>
+          </p:txBody>
+        </p:sp>
+        <p:sp>
+          <p:nvSpPr>
+            <p:cNvPr id="35" name="TextBox 34"/>
+            <p:cNvSpPr txBox="1"/>
+            <p:nvPr/>
+          </p:nvSpPr>
+          <p:spPr>
+            <a:xfrm>
+              <a:off x="4414067" y="2413236"/>
+              <a:ext cx="1755865" cy="2492990"/>
+            </a:xfrm>
+            <a:prstGeom prst="rect">
+              <a:avLst/>
+            </a:prstGeom>
+            <a:noFill/>
+          </p:spPr>
+          <p:txBody>
+            <a:bodyPr wrap="none" rtlCol="0">
+              <a:spAutoFit/>
+            </a:bodyPr>
+            <a:lstStyle/>
+            <a:p>
+              <a:r>
+                <a:rPr lang="en-US" sz="1200" dirty="0" smtClean="0"/>
+                <a:t>All Skin Concerns:</a:t>
+              </a:r>
+            </a:p>
+            <a:p>
+              <a:pPr marL="171450" indent="-171450">
+                <a:buFont typeface="Arial" panose="020B0604020202020204" pitchFamily="34" charset="0"/>
+                <a:buChar char="•"/>
+              </a:pPr>
+              <a:r>
+                <a:rPr lang="en-US" sz="1200" dirty="0" smtClean="0"/>
+                <a:t>SC00x + SC10y + …</a:t>
+              </a:r>
+            </a:p>
+            <a:p>
+              <a:endParaRPr lang="en-US" sz="1200" dirty="0"/>
+            </a:p>
+            <a:p>
+              <a:r>
+                <a:rPr lang="en-US" sz="1200" dirty="0" smtClean="0"/>
+                <a:t>Actives:</a:t>
+              </a:r>
+            </a:p>
+            <a:p>
+              <a:pPr marL="171450" indent="-171450">
+                <a:buFont typeface="Arial" panose="020B0604020202020204" pitchFamily="34" charset="0"/>
+                <a:buChar char="•"/>
+              </a:pPr>
+              <a:r>
+                <a:rPr lang="en-US" sz="1200" dirty="0" smtClean="0"/>
+                <a:t>Active a + Active b + …</a:t>
+              </a:r>
+            </a:p>
+            <a:p>
+              <a:r>
+                <a:rPr lang="en-US" sz="1200" dirty="0" smtClean="0"/>
+                <a:t>Base:</a:t>
+              </a:r>
+            </a:p>
+            <a:p>
+              <a:pPr marL="171450" indent="-171450">
+                <a:buFont typeface="Arial" panose="020B0604020202020204" pitchFamily="34" charset="0"/>
+                <a:buChar char="•"/>
+              </a:pPr>
+              <a:r>
+                <a:rPr lang="en-US" sz="1200" dirty="0" smtClean="0"/>
+                <a:t>Base n</a:t>
+              </a:r>
+            </a:p>
+            <a:p>
+              <a:endParaRPr lang="en-US" sz="1200" dirty="0" smtClean="0"/>
+            </a:p>
+            <a:p>
+              <a:r>
+                <a:rPr lang="en-US" sz="1200" dirty="0" smtClean="0"/>
+                <a:t>AI Explanation:</a:t>
+              </a:r>
+              <a:endParaRPr lang="en-US" sz="1200" dirty="0"/>
+            </a:p>
+            <a:p>
+              <a:pPr marL="171450" indent="-171450">
+                <a:buFont typeface="Arial" panose="020B0604020202020204" pitchFamily="34" charset="0"/>
+                <a:buChar char="•"/>
+              </a:pPr>
+              <a:r>
+                <a:rPr lang="en-US" sz="1200" dirty="0" smtClean="0"/>
+                <a:t>Summation of </a:t>
+              </a:r>
+            </a:p>
+            <a:p>
+              <a:r>
+                <a:rPr lang="en-US" sz="1200" dirty="0"/>
+                <a:t> </a:t>
+              </a:r>
+              <a:r>
+                <a:rPr lang="en-US" sz="1200" dirty="0" smtClean="0"/>
+                <a:t>    AI Explanation Texts</a:t>
+              </a:r>
+            </a:p>
+            <a:p>
+              <a:endParaRPr lang="en-US" sz="1200" dirty="0"/>
+            </a:p>
+            <a:p>
+              <a:r>
+                <a:rPr lang="en-US" sz="1200" strike="sngStrike" dirty="0" smtClean="0"/>
+                <a:t>Price: $20</a:t>
+              </a:r>
+              <a:endParaRPr lang="en-AU" sz="1200" strike="sngStrike" dirty="0"/>
+            </a:p>
+          </p:txBody>
+        </p:sp>
+      </p:grpSp>
+      <p:sp>
+        <p:nvSpPr>
+          <p:cNvPr id="41" name="Rectangle 40"/>
+          <p:cNvSpPr/>
+          <p:nvPr/>
+        </p:nvSpPr>
+        <p:spPr>
+          <a:xfrm>
+            <a:off x="3072978" y="932843"/>
+            <a:ext cx="2489622" cy="1128104"/>
+          </a:xfrm>
+          <a:prstGeom prst="rect">
+            <a:avLst/>
+          </a:prstGeom>
+          <a:solidFill>
+            <a:schemeClr val="accent1">
+              <a:lumMod val="20000"/>
+              <a:lumOff val="80000"/>
+            </a:schemeClr>
+          </a:solidFill>
+        </p:spPr>
+        <p:style>
+          <a:lnRef idx="2">
+            <a:schemeClr val="accent1">
+              <a:shade val="50000"/>
+            </a:schemeClr>
+          </a:lnRef>
+          <a:fillRef idx="1">
+            <a:schemeClr val="accent1"/>
+          </a:fillRef>
+          <a:effectRef idx="0">
+            <a:schemeClr val="accent1"/>
+          </a:effectRef>
+          <a:fontRef idx="minor">
+            <a:schemeClr val="lt1"/>
+          </a:fontRef>
+        </p:style>
+        <p:txBody>
+          <a:bodyPr rtlCol="0" anchor="ctr"/>
+          <a:lstStyle/>
+          <a:p>
+            <a:pPr algn="ctr"/>
+            <a:endParaRPr lang="en-AU"/>
+          </a:p>
+        </p:txBody>
+      </p:sp>
+      <p:grpSp>
+        <p:nvGrpSpPr>
+          <p:cNvPr id="20" name="Group 19"/>
+          <p:cNvGrpSpPr/>
+          <p:nvPr/>
+        </p:nvGrpSpPr>
+        <p:grpSpPr>
+          <a:xfrm>
+            <a:off x="3196589" y="1140839"/>
+            <a:ext cx="568104" cy="690121"/>
+            <a:chOff x="3337214" y="1450230"/>
+            <a:chExt cx="568104" cy="690121"/>
+          </a:xfrm>
+        </p:grpSpPr>
+        <p:sp>
+          <p:nvSpPr>
+            <p:cNvPr id="17" name="Frame 16"/>
+            <p:cNvSpPr/>
+            <p:nvPr/>
+          </p:nvSpPr>
+          <p:spPr>
+            <a:xfrm>
+              <a:off x="3337214" y="1450230"/>
+              <a:ext cx="568104" cy="690121"/>
+            </a:xfrm>
+            <a:prstGeom prst="frame">
+              <a:avLst/>
+            </a:prstGeom>
+          </p:spPr>
+          <p:style>
+            <a:lnRef idx="2">
+              <a:schemeClr val="accent1">
+                <a:shade val="50000"/>
+              </a:schemeClr>
+            </a:lnRef>
+            <a:fillRef idx="1">
+              <a:schemeClr val="accent1"/>
+            </a:fillRef>
+            <a:effectRef idx="0">
+              <a:schemeClr val="accent1"/>
+            </a:effectRef>
+            <a:fontRef idx="minor">
+              <a:schemeClr val="lt1"/>
+            </a:fontRef>
+          </p:style>
+          <p:txBody>
+            <a:bodyPr rtlCol="0" anchor="ctr"/>
+            <a:lstStyle/>
+            <a:p>
+              <a:pPr algn="ctr"/>
+              <a:endParaRPr lang="en-AU">
+                <a:solidFill>
+                  <a:schemeClr val="tx1"/>
+                </a:solidFill>
+              </a:endParaRPr>
+            </a:p>
+          </p:txBody>
+        </p:sp>
+        <p:sp>
+          <p:nvSpPr>
+            <p:cNvPr id="19" name="Smiley Face 18"/>
+            <p:cNvSpPr/>
+            <p:nvPr/>
+          </p:nvSpPr>
+          <p:spPr>
+            <a:xfrm>
+              <a:off x="3476950" y="1577604"/>
+              <a:ext cx="276225" cy="295273"/>
+            </a:xfrm>
+            <a:prstGeom prst="smileyFace">
+              <a:avLst/>
+            </a:prstGeom>
+          </p:spPr>
+          <p:style>
+            <a:lnRef idx="2">
+              <a:schemeClr val="accent1">
+                <a:shade val="50000"/>
+              </a:schemeClr>
+            </a:lnRef>
+            <a:fillRef idx="1">
+              <a:schemeClr val="accent1"/>
+            </a:fillRef>
+            <a:effectRef idx="0">
+              <a:schemeClr val="accent1"/>
+            </a:effectRef>
+            <a:fontRef idx="minor">
+              <a:schemeClr val="lt1"/>
+            </a:fontRef>
+          </p:style>
+          <p:txBody>
+            <a:bodyPr rtlCol="0" anchor="ctr"/>
+            <a:lstStyle/>
+            <a:p>
+              <a:pPr algn="ctr"/>
+              <a:endParaRPr lang="en-AU"/>
+            </a:p>
+          </p:txBody>
+        </p:sp>
+        <p:sp>
+          <p:nvSpPr>
+            <p:cNvPr id="39" name="TextBox 38"/>
+            <p:cNvSpPr txBox="1"/>
+            <p:nvPr/>
+          </p:nvSpPr>
+          <p:spPr>
+            <a:xfrm>
+              <a:off x="3337214" y="1863352"/>
+              <a:ext cx="568104" cy="276999"/>
+            </a:xfrm>
+            <a:prstGeom prst="rect">
+              <a:avLst/>
+            </a:prstGeom>
+            <a:noFill/>
+          </p:spPr>
+          <p:txBody>
+            <a:bodyPr wrap="none" rtlCol="0">
+              <a:spAutoFit/>
+            </a:bodyPr>
+            <a:lstStyle/>
+            <a:p>
+              <a:r>
+                <a:rPr lang="en-US" sz="1200" dirty="0" smtClean="0"/>
+                <a:t>Image</a:t>
+              </a:r>
+              <a:endParaRPr lang="en-AU" sz="1200" dirty="0"/>
+            </a:p>
+          </p:txBody>
+        </p:sp>
+      </p:grpSp>
+      <p:sp>
+        <p:nvSpPr>
+          <p:cNvPr id="22" name="Folded Corner 21"/>
+          <p:cNvSpPr/>
+          <p:nvPr/>
+        </p:nvSpPr>
+        <p:spPr>
+          <a:xfrm>
+            <a:off x="4242224" y="1140839"/>
+            <a:ext cx="1091687" cy="690121"/>
+          </a:xfrm>
+          <a:prstGeom prst="foldedCorner">
+            <a:avLst/>
+          </a:prstGeom>
+        </p:spPr>
+        <p:style>
+          <a:lnRef idx="2">
+            <a:schemeClr val="accent1">
+              <a:shade val="50000"/>
+            </a:schemeClr>
+          </a:lnRef>
+          <a:fillRef idx="1">
+            <a:schemeClr val="accent1"/>
+          </a:fillRef>
+          <a:effectRef idx="0">
+            <a:schemeClr val="accent1"/>
+          </a:effectRef>
+          <a:fontRef idx="minor">
+            <a:schemeClr val="lt1"/>
+          </a:fontRef>
+        </p:style>
+        <p:txBody>
+          <a:bodyPr rtlCol="0" anchor="ctr"/>
+          <a:lstStyle/>
+          <a:p>
+            <a:pPr algn="ctr"/>
+            <a:r>
+              <a:rPr lang="en-US" sz="1200" dirty="0" smtClean="0">
+                <a:solidFill>
+                  <a:schemeClr val="tx1"/>
+                </a:solidFill>
+              </a:rPr>
+              <a:t>Questionnaire</a:t>
+            </a:r>
+            <a:endParaRPr lang="en-AU" sz="1200" dirty="0">
+              <a:solidFill>
+                <a:schemeClr val="tx1"/>
+              </a:solidFill>
+            </a:endParaRPr>
+          </a:p>
+        </p:txBody>
+      </p:sp>
+      <p:sp>
+        <p:nvSpPr>
+          <p:cNvPr id="40" name="Left Arrow 39"/>
+          <p:cNvSpPr/>
+          <p:nvPr/>
+        </p:nvSpPr>
+        <p:spPr>
+          <a:xfrm rot="16200000">
+            <a:off x="3261664" y="1884193"/>
+            <a:ext cx="445570" cy="375652"/>
+          </a:xfrm>
+          <a:prstGeom prst="leftArrow">
+            <a:avLst/>
+          </a:prstGeom>
+        </p:spPr>
+        <p:style>
+          <a:lnRef idx="2">
+            <a:schemeClr val="accent1">
+              <a:shade val="50000"/>
+            </a:schemeClr>
+          </a:lnRef>
+          <a:fillRef idx="1">
+            <a:schemeClr val="accent1"/>
+          </a:fillRef>
+          <a:effectRef idx="0">
+            <a:schemeClr val="accent1"/>
+          </a:effectRef>
+          <a:fontRef idx="minor">
+            <a:schemeClr val="lt1"/>
+          </a:fontRef>
+        </p:style>
+        <p:txBody>
+          <a:bodyPr rtlCol="0" anchor="ctr"/>
+          <a:lstStyle/>
+          <a:p>
+            <a:pPr algn="ctr"/>
+            <a:endParaRPr lang="en-AU" dirty="0"/>
+          </a:p>
+        </p:txBody>
+      </p:sp>
+      <p:sp>
+        <p:nvSpPr>
+          <p:cNvPr id="42" name="Rounded Rectangle 41"/>
+          <p:cNvSpPr/>
+          <p:nvPr/>
+        </p:nvSpPr>
+        <p:spPr>
+          <a:xfrm>
+            <a:off x="3071132" y="2289324"/>
+            <a:ext cx="882905" cy="299542"/>
+          </a:xfrm>
+          <a:prstGeom prst="roundRect">
+            <a:avLst/>
+          </a:prstGeom>
+        </p:spPr>
+        <p:style>
+          <a:lnRef idx="2">
+            <a:schemeClr val="accent1">
+              <a:shade val="50000"/>
+            </a:schemeClr>
+          </a:lnRef>
+          <a:fillRef idx="1">
+            <a:schemeClr val="accent1"/>
+          </a:fillRef>
+          <a:effectRef idx="0">
+            <a:schemeClr val="accent1"/>
+          </a:effectRef>
+          <a:fontRef idx="minor">
+            <a:schemeClr val="lt1"/>
+          </a:fontRef>
+        </p:style>
+        <p:txBody>
+          <a:bodyPr rtlCol="0" anchor="ctr"/>
+          <a:lstStyle/>
+          <a:p>
+            <a:pPr algn="ctr"/>
+            <a:r>
+              <a:rPr lang="en-US" sz="1200" dirty="0" smtClean="0"/>
+              <a:t>Visual AI</a:t>
+            </a:r>
+            <a:endParaRPr lang="en-AU" sz="1200" dirty="0"/>
+          </a:p>
+        </p:txBody>
+      </p:sp>
+      <p:sp>
+        <p:nvSpPr>
+          <p:cNvPr id="58" name="Left Arrow 57"/>
+          <p:cNvSpPr/>
+          <p:nvPr/>
+        </p:nvSpPr>
+        <p:spPr>
+          <a:xfrm rot="16200000">
+            <a:off x="3282948" y="2605791"/>
+            <a:ext cx="430348" cy="422627"/>
+          </a:xfrm>
+          <a:prstGeom prst="leftArrow">
+            <a:avLst/>
+          </a:prstGeom>
+        </p:spPr>
+        <p:style>
+          <a:lnRef idx="2">
+            <a:schemeClr val="accent1">
+              <a:shade val="50000"/>
+            </a:schemeClr>
+          </a:lnRef>
+          <a:fillRef idx="1">
+            <a:schemeClr val="accent1"/>
+          </a:fillRef>
+          <a:effectRef idx="0">
+            <a:schemeClr val="accent1"/>
+          </a:effectRef>
+          <a:fontRef idx="minor">
+            <a:schemeClr val="lt1"/>
+          </a:fontRef>
+        </p:style>
+        <p:txBody>
+          <a:bodyPr rtlCol="0" anchor="ctr"/>
+          <a:lstStyle/>
+          <a:p>
+            <a:pPr algn="ctr"/>
+            <a:endParaRPr lang="en-AU"/>
+          </a:p>
+        </p:txBody>
+      </p:sp>
+      <p:sp>
+        <p:nvSpPr>
+          <p:cNvPr id="43" name="Rectangle 42"/>
+          <p:cNvSpPr/>
+          <p:nvPr/>
+        </p:nvSpPr>
+        <p:spPr>
+          <a:xfrm>
+            <a:off x="2752726" y="3009898"/>
+            <a:ext cx="1635195" cy="497351"/>
+          </a:xfrm>
+          <a:prstGeom prst="rect">
+            <a:avLst/>
+          </a:prstGeom>
+          <a:solidFill>
+            <a:schemeClr val="accent1">
+              <a:lumMod val="20000"/>
+              <a:lumOff val="80000"/>
+            </a:schemeClr>
+          </a:solidFill>
+        </p:spPr>
+        <p:style>
+          <a:lnRef idx="2">
+            <a:schemeClr val="accent1">
+              <a:shade val="50000"/>
+            </a:schemeClr>
+          </a:lnRef>
+          <a:fillRef idx="1">
+            <a:schemeClr val="accent1"/>
+          </a:fillRef>
+          <a:effectRef idx="0">
+            <a:schemeClr val="accent1"/>
+          </a:effectRef>
+          <a:fontRef idx="minor">
+            <a:schemeClr val="lt1"/>
+          </a:fontRef>
+        </p:style>
+        <p:txBody>
+          <a:bodyPr rtlCol="0" anchor="ctr"/>
+          <a:lstStyle/>
+          <a:p>
+            <a:pPr marL="171450" indent="-171450">
+              <a:buFont typeface="Arial" panose="020B0604020202020204" pitchFamily="34" charset="0"/>
+              <a:buChar char="•"/>
+            </a:pPr>
+            <a:r>
+              <a:rPr lang="en-US" sz="1200" dirty="0" smtClean="0">
+                <a:solidFill>
+                  <a:schemeClr val="tx1"/>
+                </a:solidFill>
+              </a:rPr>
+              <a:t>Visual Skin Concerns</a:t>
+            </a:r>
+          </a:p>
+          <a:p>
+            <a:r>
+              <a:rPr lang="en-US" sz="1200" dirty="0" smtClean="0">
+                <a:solidFill>
+                  <a:schemeClr val="tx1"/>
+                </a:solidFill>
+              </a:rPr>
+              <a:t>     + AI Explanations</a:t>
+            </a:r>
+            <a:endParaRPr lang="en-AU" sz="1200" dirty="0">
+              <a:solidFill>
+                <a:schemeClr val="tx1"/>
+              </a:solidFill>
+            </a:endParaRPr>
+          </a:p>
+        </p:txBody>
+      </p:sp>
+      <p:sp>
+        <p:nvSpPr>
+          <p:cNvPr id="59" name="Left Arrow 58"/>
+          <p:cNvSpPr/>
+          <p:nvPr/>
+        </p:nvSpPr>
+        <p:spPr>
+          <a:xfrm rot="16200000">
+            <a:off x="3922575" y="2665979"/>
+            <a:ext cx="2076796" cy="406754"/>
+          </a:xfrm>
+          <a:prstGeom prst="leftArrow">
+            <a:avLst/>
+          </a:prstGeom>
+        </p:spPr>
+        <p:style>
+          <a:lnRef idx="2">
+            <a:schemeClr val="accent1">
+              <a:shade val="50000"/>
+            </a:schemeClr>
+          </a:lnRef>
+          <a:fillRef idx="1">
+            <a:schemeClr val="accent1"/>
+          </a:fillRef>
+          <a:effectRef idx="0">
+            <a:schemeClr val="accent1"/>
+          </a:effectRef>
+          <a:fontRef idx="minor">
+            <a:schemeClr val="lt1"/>
+          </a:fontRef>
+        </p:style>
+        <p:txBody>
+          <a:bodyPr rtlCol="0" anchor="ctr"/>
+          <a:lstStyle/>
+          <a:p>
+            <a:pPr algn="ctr"/>
+            <a:endParaRPr lang="en-AU"/>
+          </a:p>
+        </p:txBody>
+      </p:sp>
+      <p:grpSp>
+        <p:nvGrpSpPr>
+          <p:cNvPr id="47" name="Group 46"/>
+          <p:cNvGrpSpPr/>
+          <p:nvPr/>
+        </p:nvGrpSpPr>
+        <p:grpSpPr>
+          <a:xfrm>
+            <a:off x="3852739" y="4794640"/>
+            <a:ext cx="3096015" cy="535396"/>
+            <a:chOff x="2951322" y="3685146"/>
+            <a:chExt cx="3096015" cy="535396"/>
+          </a:xfrm>
+        </p:grpSpPr>
+        <p:sp>
+          <p:nvSpPr>
+            <p:cNvPr id="60" name="Rounded Rectangle 59"/>
+            <p:cNvSpPr/>
+            <p:nvPr/>
+          </p:nvSpPr>
+          <p:spPr>
+            <a:xfrm>
+              <a:off x="2951322" y="3690688"/>
+              <a:ext cx="2425306" cy="529854"/>
+            </a:xfrm>
+            <a:prstGeom prst="roundRect">
+              <a:avLst/>
+            </a:prstGeom>
+          </p:spPr>
+          <p:style>
+            <a:lnRef idx="2">
+              <a:schemeClr val="accent1">
+                <a:shade val="50000"/>
+              </a:schemeClr>
+            </a:lnRef>
+            <a:fillRef idx="1">
+              <a:schemeClr val="accent1"/>
+            </a:fillRef>
+            <a:effectRef idx="0">
+              <a:schemeClr val="accent1"/>
+            </a:effectRef>
+            <a:fontRef idx="minor">
+              <a:schemeClr val="lt1"/>
+            </a:fontRef>
+          </p:style>
+          <p:txBody>
+            <a:bodyPr rtlCol="0" anchor="ctr"/>
+            <a:lstStyle/>
+            <a:p>
+              <a:pPr algn="ctr"/>
+              <a:r>
+                <a:rPr lang="en-US" sz="1200" dirty="0" smtClean="0"/>
+                <a:t>  LLM    .  </a:t>
+              </a:r>
+              <a:endParaRPr lang="en-AU" sz="1200" dirty="0"/>
+            </a:p>
+          </p:txBody>
+        </p:sp>
+        <p:sp>
+          <p:nvSpPr>
+            <p:cNvPr id="68" name="Left Arrow 67"/>
+            <p:cNvSpPr/>
+            <p:nvPr/>
+          </p:nvSpPr>
+          <p:spPr>
+            <a:xfrm>
+              <a:off x="5040693" y="3718773"/>
+              <a:ext cx="472314" cy="426053"/>
+            </a:xfrm>
+            <a:prstGeom prst="leftArrow">
+              <a:avLst/>
+            </a:prstGeom>
+            <a:solidFill>
+              <a:schemeClr val="accent1">
+                <a:lumMod val="60000"/>
+                <a:lumOff val="40000"/>
+              </a:schemeClr>
+            </a:solidFill>
+          </p:spPr>
+          <p:style>
+            <a:lnRef idx="2">
+              <a:schemeClr val="accent1">
+                <a:shade val="50000"/>
+              </a:schemeClr>
+            </a:lnRef>
+            <a:fillRef idx="1">
+              <a:schemeClr val="accent1"/>
+            </a:fillRef>
+            <a:effectRef idx="0">
+              <a:schemeClr val="accent1"/>
+            </a:effectRef>
+            <a:fontRef idx="minor">
+              <a:schemeClr val="lt1"/>
+            </a:fontRef>
+          </p:style>
+          <p:txBody>
+            <a:bodyPr rtlCol="0" anchor="ctr"/>
+            <a:lstStyle/>
+            <a:p>
+              <a:pPr algn="ctr"/>
+              <a:endParaRPr lang="en-AU"/>
+            </a:p>
+          </p:txBody>
+        </p:sp>
+        <p:sp>
+          <p:nvSpPr>
+            <p:cNvPr id="67" name="Rounded Rectangle 66"/>
+            <p:cNvSpPr/>
+            <p:nvPr/>
+          </p:nvSpPr>
+          <p:spPr>
+            <a:xfrm>
+              <a:off x="5383997" y="3685146"/>
+              <a:ext cx="663340" cy="529854"/>
+            </a:xfrm>
+            <a:prstGeom prst="roundRect">
+              <a:avLst/>
+            </a:prstGeom>
+          </p:spPr>
+          <p:style>
+            <a:lnRef idx="2">
+              <a:schemeClr val="accent1">
+                <a:shade val="50000"/>
+              </a:schemeClr>
+            </a:lnRef>
+            <a:fillRef idx="1">
+              <a:schemeClr val="accent1"/>
+            </a:fillRef>
+            <a:effectRef idx="0">
+              <a:schemeClr val="accent1"/>
+            </a:effectRef>
+            <a:fontRef idx="minor">
+              <a:schemeClr val="lt1"/>
+            </a:fontRef>
+          </p:style>
+          <p:txBody>
+            <a:bodyPr rtlCol="0" anchor="ctr"/>
+            <a:lstStyle/>
+            <a:p>
+              <a:pPr algn="ctr"/>
+              <a:r>
+                <a:rPr lang="en-US" sz="1200" dirty="0" err="1" smtClean="0"/>
+                <a:t>CelRev</a:t>
+              </a:r>
+              <a:endParaRPr lang="en-US" sz="1200" dirty="0" smtClean="0"/>
+            </a:p>
+            <a:p>
+              <a:pPr algn="ctr"/>
+              <a:r>
+                <a:rPr lang="en-US" sz="1200" dirty="0" smtClean="0"/>
+                <a:t>RAG</a:t>
+              </a:r>
+              <a:endParaRPr lang="en-AU" sz="1200" dirty="0"/>
+            </a:p>
+          </p:txBody>
+        </p:sp>
+      </p:grpSp>
+      <p:sp>
+        <p:nvSpPr>
+          <p:cNvPr id="46" name="TextBox 45"/>
+          <p:cNvSpPr txBox="1"/>
+          <p:nvPr/>
+        </p:nvSpPr>
+        <p:spPr>
+          <a:xfrm>
+            <a:off x="3322925" y="1762127"/>
+            <a:ext cx="341094" cy="432554"/>
+          </a:xfrm>
+          <a:prstGeom prst="rect">
+            <a:avLst/>
+          </a:prstGeom>
+          <a:noFill/>
+        </p:spPr>
+        <p:txBody>
+          <a:bodyPr wrap="square" rtlCol="0">
+            <a:spAutoFit/>
+          </a:bodyPr>
+          <a:lstStyle/>
+          <a:p>
+            <a:r>
+              <a:rPr lang="en-US" b="1" dirty="0" smtClean="0">
+                <a:solidFill>
+                  <a:srgbClr val="FF0000"/>
+                </a:solidFill>
+                <a:effectLst>
+                  <a:outerShdw blurRad="38100" dist="38100" dir="2700000" algn="tl">
+                    <a:srgbClr val="000000">
+                      <a:alpha val="43137"/>
+                    </a:srgbClr>
+                  </a:outerShdw>
+                </a:effectLst>
+              </a:rPr>
+              <a:t>1</a:t>
+            </a:r>
+            <a:endParaRPr lang="en-AU" b="1" dirty="0">
+              <a:solidFill>
+                <a:srgbClr val="FF0000"/>
+              </a:solidFill>
+              <a:effectLst>
+                <a:outerShdw blurRad="38100" dist="38100" dir="2700000" algn="tl">
+                  <a:srgbClr val="000000">
+                    <a:alpha val="43137"/>
+                  </a:srgbClr>
+                </a:outerShdw>
+              </a:effectLst>
+            </a:endParaRPr>
+          </a:p>
+        </p:txBody>
+      </p:sp>
+      <p:sp>
+        <p:nvSpPr>
+          <p:cNvPr id="83" name="TextBox 82"/>
+          <p:cNvSpPr txBox="1"/>
+          <p:nvPr/>
+        </p:nvSpPr>
+        <p:spPr>
+          <a:xfrm>
+            <a:off x="3337209" y="2584825"/>
+            <a:ext cx="328936" cy="432554"/>
+          </a:xfrm>
+          <a:prstGeom prst="rect">
+            <a:avLst/>
+          </a:prstGeom>
+          <a:noFill/>
+        </p:spPr>
+        <p:txBody>
+          <a:bodyPr wrap="none" rtlCol="0">
+            <a:spAutoFit/>
+          </a:bodyPr>
+          <a:lstStyle/>
+          <a:p>
+            <a:r>
+              <a:rPr lang="en-US" b="1" dirty="0">
+                <a:solidFill>
+                  <a:srgbClr val="FF0000"/>
+                </a:solidFill>
+                <a:effectLst>
+                  <a:outerShdw blurRad="38100" dist="38100" dir="2700000" algn="tl">
+                    <a:srgbClr val="000000">
+                      <a:alpha val="43137"/>
+                    </a:srgbClr>
+                  </a:outerShdw>
+                </a:effectLst>
+              </a:rPr>
+              <a:t>2</a:t>
+            </a:r>
+            <a:endParaRPr lang="en-AU" b="1" dirty="0">
+              <a:solidFill>
+                <a:srgbClr val="FF0000"/>
+              </a:solidFill>
+              <a:effectLst>
+                <a:outerShdw blurRad="38100" dist="38100" dir="2700000" algn="tl">
+                  <a:srgbClr val="000000">
+                    <a:alpha val="43137"/>
+                  </a:srgbClr>
+                </a:outerShdw>
+              </a:effectLst>
+            </a:endParaRPr>
+          </a:p>
+        </p:txBody>
+      </p:sp>
+      <p:sp>
+        <p:nvSpPr>
+          <p:cNvPr id="86" name="Left Arrow 85"/>
+          <p:cNvSpPr/>
+          <p:nvPr/>
+        </p:nvSpPr>
+        <p:spPr>
+          <a:xfrm rot="16200000">
+            <a:off x="3351907" y="3462318"/>
+            <a:ext cx="430348" cy="422627"/>
+          </a:xfrm>
+          <a:prstGeom prst="leftArrow">
+            <a:avLst/>
+          </a:prstGeom>
+        </p:spPr>
+        <p:style>
+          <a:lnRef idx="2">
+            <a:schemeClr val="accent1">
+              <a:shade val="50000"/>
+            </a:schemeClr>
+          </a:lnRef>
+          <a:fillRef idx="1">
+            <a:schemeClr val="accent1"/>
+          </a:fillRef>
+          <a:effectRef idx="0">
+            <a:schemeClr val="accent1"/>
+          </a:effectRef>
+          <a:fontRef idx="minor">
+            <a:schemeClr val="lt1"/>
+          </a:fontRef>
+        </p:style>
+        <p:txBody>
+          <a:bodyPr rtlCol="0" anchor="ctr"/>
+          <a:lstStyle/>
+          <a:p>
+            <a:pPr algn="ctr"/>
+            <a:endParaRPr lang="en-AU"/>
+          </a:p>
+        </p:txBody>
+      </p:sp>
+      <p:sp>
+        <p:nvSpPr>
+          <p:cNvPr id="90" name="Rectangle 89"/>
+          <p:cNvSpPr/>
+          <p:nvPr/>
+        </p:nvSpPr>
+        <p:spPr>
+          <a:xfrm>
+            <a:off x="3978590" y="5745067"/>
+            <a:ext cx="2584135" cy="951850"/>
+          </a:xfrm>
+          <a:prstGeom prst="rect">
+            <a:avLst/>
+          </a:prstGeom>
+          <a:solidFill>
+            <a:schemeClr val="accent1">
+              <a:lumMod val="20000"/>
+              <a:lumOff val="80000"/>
+            </a:schemeClr>
+          </a:solidFill>
+        </p:spPr>
+        <p:style>
+          <a:lnRef idx="2">
+            <a:schemeClr val="accent1">
+              <a:shade val="50000"/>
+            </a:schemeClr>
+          </a:lnRef>
+          <a:fillRef idx="1">
+            <a:schemeClr val="accent1"/>
+          </a:fillRef>
+          <a:effectRef idx="0">
+            <a:schemeClr val="accent1"/>
+          </a:effectRef>
+          <a:fontRef idx="minor">
+            <a:schemeClr val="lt1"/>
+          </a:fontRef>
+        </p:style>
+        <p:txBody>
+          <a:bodyPr rtlCol="0" anchor="ctr"/>
+          <a:lstStyle/>
+          <a:p>
+            <a:pPr marL="171450" indent="-171450">
+              <a:buFont typeface="Arial" panose="020B0604020202020204" pitchFamily="34" charset="0"/>
+              <a:buChar char="•"/>
+            </a:pPr>
+            <a:r>
+              <a:rPr lang="en-US" sz="1200" dirty="0" smtClean="0">
+                <a:solidFill>
+                  <a:schemeClr val="tx1"/>
+                </a:solidFill>
+              </a:rPr>
+              <a:t>All Skin Concerns + </a:t>
+            </a:r>
+            <a:r>
+              <a:rPr lang="en-US" sz="1200" dirty="0">
+                <a:solidFill>
+                  <a:schemeClr val="tx1"/>
+                </a:solidFill>
+              </a:rPr>
+              <a:t>AI Explanations</a:t>
+            </a:r>
+            <a:endParaRPr lang="en-US" sz="1200" dirty="0" smtClean="0">
+              <a:solidFill>
+                <a:schemeClr val="tx1"/>
+              </a:solidFill>
+            </a:endParaRPr>
+          </a:p>
+          <a:p>
+            <a:pPr marL="171450" indent="-171450">
+              <a:buFont typeface="Arial" panose="020B0604020202020204" pitchFamily="34" charset="0"/>
+              <a:buChar char="•"/>
+            </a:pPr>
+            <a:r>
+              <a:rPr lang="en-US" sz="1200" dirty="0" smtClean="0">
+                <a:solidFill>
+                  <a:schemeClr val="tx1"/>
+                </a:solidFill>
+              </a:rPr>
+              <a:t>List of bases + </a:t>
+            </a:r>
+            <a:r>
+              <a:rPr lang="en-US" sz="1200" dirty="0">
+                <a:solidFill>
+                  <a:schemeClr val="tx1"/>
+                </a:solidFill>
+              </a:rPr>
+              <a:t>AI Explanations</a:t>
+            </a:r>
+            <a:endParaRPr lang="en-US" sz="1200" dirty="0" smtClean="0">
+              <a:solidFill>
+                <a:schemeClr val="tx1"/>
+              </a:solidFill>
+            </a:endParaRPr>
+          </a:p>
+          <a:p>
+            <a:pPr marL="171450" indent="-171450">
+              <a:buFont typeface="Arial" panose="020B0604020202020204" pitchFamily="34" charset="0"/>
+              <a:buChar char="•"/>
+            </a:pPr>
+            <a:r>
+              <a:rPr lang="en-US" sz="1200" dirty="0" smtClean="0">
+                <a:solidFill>
+                  <a:schemeClr val="tx1"/>
+                </a:solidFill>
+              </a:rPr>
+              <a:t>Actives + </a:t>
+            </a:r>
+            <a:r>
+              <a:rPr lang="en-US" sz="1200" dirty="0">
+                <a:solidFill>
+                  <a:schemeClr val="tx1"/>
+                </a:solidFill>
+              </a:rPr>
+              <a:t>AI Explanations</a:t>
+            </a:r>
+            <a:endParaRPr lang="en-US" sz="1200" dirty="0" smtClean="0">
+              <a:solidFill>
+                <a:schemeClr val="tx1"/>
+              </a:solidFill>
+            </a:endParaRPr>
+          </a:p>
+          <a:p>
+            <a:pPr marL="733029" lvl="1" indent="-171450">
+              <a:buFont typeface="Courier New" panose="02070309020205020404" pitchFamily="49" charset="0"/>
+              <a:buChar char="o"/>
+            </a:pPr>
+            <a:r>
+              <a:rPr lang="en-US" sz="1200" dirty="0">
+                <a:solidFill>
+                  <a:schemeClr val="tx1"/>
+                </a:solidFill>
+              </a:rPr>
+              <a:t>compatible to </a:t>
+            </a:r>
+            <a:r>
+              <a:rPr lang="en-US" sz="1200" dirty="0" smtClean="0">
+                <a:solidFill>
+                  <a:schemeClr val="tx1"/>
+                </a:solidFill>
+              </a:rPr>
+              <a:t>bases</a:t>
+            </a:r>
+          </a:p>
+          <a:p>
+            <a:pPr marL="733029" lvl="1" indent="-171450">
+              <a:buFont typeface="Courier New" panose="02070309020205020404" pitchFamily="49" charset="0"/>
+              <a:buChar char="o"/>
+            </a:pPr>
+            <a:r>
+              <a:rPr lang="en-US" sz="1200" dirty="0" smtClean="0">
+                <a:solidFill>
+                  <a:schemeClr val="tx1"/>
+                </a:solidFill>
+              </a:rPr>
+              <a:t>effective for skin concerns</a:t>
+            </a:r>
+          </a:p>
+        </p:txBody>
+      </p:sp>
+      <p:sp>
+        <p:nvSpPr>
+          <p:cNvPr id="91" name="Left Arrow 90"/>
+          <p:cNvSpPr/>
+          <p:nvPr/>
+        </p:nvSpPr>
+        <p:spPr>
+          <a:xfrm rot="16200000">
+            <a:off x="3902709" y="5156511"/>
+            <a:ext cx="710222" cy="418452"/>
+          </a:xfrm>
+          <a:prstGeom prst="leftArrow">
+            <a:avLst/>
+          </a:prstGeom>
+        </p:spPr>
+        <p:style>
+          <a:lnRef idx="2">
+            <a:schemeClr val="accent1">
+              <a:shade val="50000"/>
+            </a:schemeClr>
+          </a:lnRef>
+          <a:fillRef idx="1">
+            <a:schemeClr val="accent1"/>
+          </a:fillRef>
+          <a:effectRef idx="0">
+            <a:schemeClr val="accent1"/>
+          </a:effectRef>
+          <a:fontRef idx="minor">
+            <a:schemeClr val="lt1"/>
+          </a:fontRef>
+        </p:style>
+        <p:txBody>
+          <a:bodyPr rtlCol="0" anchor="ctr"/>
+          <a:lstStyle/>
+          <a:p>
+            <a:pPr algn="ctr"/>
+            <a:endParaRPr lang="en-AU"/>
+          </a:p>
+        </p:txBody>
+      </p:sp>
+      <p:sp>
+        <p:nvSpPr>
+          <p:cNvPr id="92" name="TextBox 91"/>
+          <p:cNvSpPr txBox="1"/>
+          <p:nvPr/>
+        </p:nvSpPr>
+        <p:spPr>
+          <a:xfrm>
+            <a:off x="4096182" y="5284024"/>
+            <a:ext cx="328936" cy="432554"/>
+          </a:xfrm>
+          <a:prstGeom prst="rect">
+            <a:avLst/>
+          </a:prstGeom>
+          <a:noFill/>
+        </p:spPr>
+        <p:txBody>
+          <a:bodyPr wrap="none" rtlCol="0">
+            <a:spAutoFit/>
+          </a:bodyPr>
+          <a:lstStyle/>
+          <a:p>
+            <a:r>
+              <a:rPr lang="en-US" b="1" dirty="0" smtClean="0">
+                <a:solidFill>
+                  <a:srgbClr val="FF0000"/>
+                </a:solidFill>
+                <a:effectLst>
+                  <a:outerShdw blurRad="38100" dist="38100" dir="2700000" algn="tl">
+                    <a:srgbClr val="000000">
+                      <a:alpha val="43137"/>
+                    </a:srgbClr>
+                  </a:outerShdw>
+                </a:effectLst>
+              </a:rPr>
+              <a:t>4</a:t>
+            </a:r>
+            <a:endParaRPr lang="en-AU" b="1" dirty="0">
+              <a:solidFill>
+                <a:srgbClr val="FF0000"/>
+              </a:solidFill>
+              <a:effectLst>
+                <a:outerShdw blurRad="38100" dist="38100" dir="2700000" algn="tl">
+                  <a:srgbClr val="000000">
+                    <a:alpha val="43137"/>
+                  </a:srgbClr>
+                </a:outerShdw>
+              </a:effectLst>
+            </a:endParaRPr>
+          </a:p>
+        </p:txBody>
+      </p:sp>
+      <p:sp>
+        <p:nvSpPr>
+          <p:cNvPr id="54" name="Half Frame 53"/>
+          <p:cNvSpPr/>
+          <p:nvPr/>
+        </p:nvSpPr>
+        <p:spPr>
+          <a:xfrm rot="13475004">
+            <a:off x="3703562" y="3203754"/>
+            <a:ext cx="1143856" cy="1155749"/>
+          </a:xfrm>
+          <a:prstGeom prst="halfFrame">
+            <a:avLst>
+              <a:gd name="adj1" fmla="val 11711"/>
+              <a:gd name="adj2" fmla="val 13527"/>
+            </a:avLst>
+          </a:prstGeom>
+        </p:spPr>
+        <p:style>
+          <a:lnRef idx="2">
+            <a:schemeClr val="accent1">
+              <a:shade val="50000"/>
+            </a:schemeClr>
+          </a:lnRef>
+          <a:fillRef idx="1">
+            <a:schemeClr val="accent1"/>
+          </a:fillRef>
+          <a:effectRef idx="0">
+            <a:schemeClr val="accent1"/>
+          </a:effectRef>
+          <a:fontRef idx="minor">
+            <a:schemeClr val="lt1"/>
+          </a:fontRef>
+        </p:style>
+        <p:txBody>
+          <a:bodyPr rtlCol="0" anchor="ctr"/>
+          <a:lstStyle/>
+          <a:p>
+            <a:pPr algn="ctr"/>
+            <a:endParaRPr lang="en-AU">
+              <a:solidFill>
+                <a:schemeClr val="tx1"/>
+              </a:solidFill>
+            </a:endParaRPr>
+          </a:p>
+        </p:txBody>
+      </p:sp>
+      <p:sp>
+        <p:nvSpPr>
+          <p:cNvPr id="97" name="Left Arrow 96"/>
+          <p:cNvSpPr/>
+          <p:nvPr/>
+        </p:nvSpPr>
+        <p:spPr>
+          <a:xfrm rot="16200000">
+            <a:off x="3953398" y="4453177"/>
+            <a:ext cx="630072" cy="464890"/>
+          </a:xfrm>
+          <a:prstGeom prst="leftArrow">
+            <a:avLst/>
+          </a:prstGeom>
+        </p:spPr>
+        <p:style>
+          <a:lnRef idx="2">
+            <a:schemeClr val="accent1">
+              <a:shade val="50000"/>
+            </a:schemeClr>
+          </a:lnRef>
+          <a:fillRef idx="1">
+            <a:schemeClr val="accent1"/>
+          </a:fillRef>
+          <a:effectRef idx="0">
+            <a:schemeClr val="accent1"/>
+          </a:effectRef>
+          <a:fontRef idx="minor">
+            <a:schemeClr val="lt1"/>
+          </a:fontRef>
+        </p:style>
+        <p:txBody>
+          <a:bodyPr rtlCol="0" anchor="ctr"/>
+          <a:lstStyle/>
+          <a:p>
+            <a:pPr algn="ctr"/>
+            <a:endParaRPr lang="en-AU"/>
+          </a:p>
+        </p:txBody>
+      </p:sp>
+      <p:sp>
+        <p:nvSpPr>
+          <p:cNvPr id="98" name="TextBox 97"/>
+          <p:cNvSpPr txBox="1"/>
+          <p:nvPr/>
+        </p:nvSpPr>
+        <p:spPr>
+          <a:xfrm>
+            <a:off x="4096182" y="4396193"/>
+            <a:ext cx="359325" cy="432554"/>
+          </a:xfrm>
+          <a:prstGeom prst="rect">
+            <a:avLst/>
+          </a:prstGeom>
+          <a:noFill/>
+        </p:spPr>
+        <p:txBody>
+          <a:bodyPr wrap="square" rtlCol="0">
+            <a:spAutoFit/>
+          </a:bodyPr>
+          <a:lstStyle/>
+          <a:p>
+            <a:r>
+              <a:rPr lang="en-US" b="1" dirty="0" smtClean="0">
+                <a:solidFill>
+                  <a:srgbClr val="FF0000"/>
+                </a:solidFill>
+                <a:effectLst>
+                  <a:outerShdw blurRad="38100" dist="38100" dir="2700000" algn="tl">
+                    <a:srgbClr val="000000">
+                      <a:alpha val="43137"/>
+                    </a:srgbClr>
+                  </a:outerShdw>
+                </a:effectLst>
+              </a:rPr>
+              <a:t>3</a:t>
+            </a:r>
+            <a:endParaRPr lang="en-AU" b="1" dirty="0">
+              <a:solidFill>
+                <a:srgbClr val="FF0000"/>
+              </a:solidFill>
+              <a:effectLst>
+                <a:outerShdw blurRad="38100" dist="38100" dir="2700000" algn="tl">
+                  <a:srgbClr val="000000">
+                    <a:alpha val="43137"/>
+                  </a:srgbClr>
+                </a:outerShdw>
+              </a:effectLst>
+            </a:endParaRPr>
+          </a:p>
+        </p:txBody>
+      </p:sp>
+      <p:sp>
+        <p:nvSpPr>
+          <p:cNvPr id="99" name="Left Arrow 98"/>
+          <p:cNvSpPr/>
+          <p:nvPr/>
+        </p:nvSpPr>
+        <p:spPr>
+          <a:xfrm rot="10800000">
+            <a:off x="6562725" y="5936671"/>
+            <a:ext cx="1560327" cy="406754"/>
+          </a:xfrm>
+          <a:prstGeom prst="leftArrow">
+            <a:avLst/>
+          </a:prstGeom>
+        </p:spPr>
+        <p:style>
+          <a:lnRef idx="2">
+            <a:schemeClr val="accent1">
+              <a:shade val="50000"/>
+            </a:schemeClr>
+          </a:lnRef>
+          <a:fillRef idx="1">
+            <a:schemeClr val="accent1"/>
+          </a:fillRef>
+          <a:effectRef idx="0">
+            <a:schemeClr val="accent1"/>
+          </a:effectRef>
+          <a:fontRef idx="minor">
+            <a:schemeClr val="lt1"/>
+          </a:fontRef>
+        </p:style>
+        <p:txBody>
+          <a:bodyPr rtlCol="0" anchor="ctr"/>
+          <a:lstStyle/>
+          <a:p>
+            <a:pPr algn="ctr"/>
+            <a:endParaRPr lang="en-AU"/>
+          </a:p>
+        </p:txBody>
+      </p:sp>
+      <p:sp>
+        <p:nvSpPr>
+          <p:cNvPr id="100" name="TextBox 99"/>
+          <p:cNvSpPr txBox="1"/>
+          <p:nvPr/>
+        </p:nvSpPr>
+        <p:spPr>
+          <a:xfrm>
+            <a:off x="6877996" y="6001548"/>
+            <a:ext cx="871457" cy="276999"/>
+          </a:xfrm>
+          <a:prstGeom prst="rect">
+            <a:avLst/>
+          </a:prstGeom>
+          <a:noFill/>
+        </p:spPr>
+        <p:txBody>
+          <a:bodyPr wrap="none" rtlCol="0">
+            <a:spAutoFit/>
+          </a:bodyPr>
+          <a:lstStyle/>
+          <a:p>
+            <a:r>
+              <a:rPr lang="en-US" sz="1200" dirty="0" smtClean="0"/>
+              <a:t>Formatting</a:t>
+            </a:r>
+            <a:endParaRPr lang="en-AU" sz="1200" dirty="0"/>
+          </a:p>
+        </p:txBody>
+      </p:sp>
+      <p:sp>
+        <p:nvSpPr>
+          <p:cNvPr id="101" name="Left Arrow 100"/>
+          <p:cNvSpPr/>
+          <p:nvPr/>
+        </p:nvSpPr>
+        <p:spPr>
+          <a:xfrm rot="10800000">
+            <a:off x="10110278" y="5922220"/>
+            <a:ext cx="2263350" cy="421204"/>
+          </a:xfrm>
+          <a:prstGeom prst="leftArrow">
+            <a:avLst/>
+          </a:prstGeom>
+        </p:spPr>
+        <p:style>
+          <a:lnRef idx="2">
+            <a:schemeClr val="accent1">
+              <a:shade val="50000"/>
+            </a:schemeClr>
+          </a:lnRef>
+          <a:fillRef idx="1">
+            <a:schemeClr val="accent1"/>
+          </a:fillRef>
+          <a:effectRef idx="0">
+            <a:schemeClr val="accent1"/>
+          </a:effectRef>
+          <a:fontRef idx="minor">
+            <a:schemeClr val="lt1"/>
+          </a:fontRef>
+        </p:style>
+        <p:txBody>
+          <a:bodyPr rtlCol="0" anchor="ctr"/>
+          <a:lstStyle/>
+          <a:p>
+            <a:pPr algn="ctr"/>
+            <a:endParaRPr lang="en-AU"/>
+          </a:p>
+        </p:txBody>
+      </p:sp>
+      <p:sp>
+        <p:nvSpPr>
+          <p:cNvPr id="102" name="TextBox 101"/>
+          <p:cNvSpPr txBox="1"/>
+          <p:nvPr/>
+        </p:nvSpPr>
+        <p:spPr>
+          <a:xfrm>
+            <a:off x="10227906" y="5992495"/>
+            <a:ext cx="1913794" cy="276999"/>
+          </a:xfrm>
+          <a:prstGeom prst="rect">
+            <a:avLst/>
+          </a:prstGeom>
+          <a:noFill/>
+        </p:spPr>
+        <p:txBody>
+          <a:bodyPr wrap="none" rtlCol="0">
+            <a:spAutoFit/>
+          </a:bodyPr>
+          <a:lstStyle/>
+          <a:p>
+            <a:r>
+              <a:rPr lang="en-US" sz="1200" dirty="0" smtClean="0"/>
+              <a:t>To check out/ shopping cart</a:t>
+            </a:r>
+            <a:endParaRPr lang="en-AU" sz="1200" dirty="0"/>
+          </a:p>
+        </p:txBody>
+      </p:sp>
+      <p:sp>
+        <p:nvSpPr>
+          <p:cNvPr id="103" name="TextBox 102"/>
+          <p:cNvSpPr txBox="1"/>
+          <p:nvPr/>
+        </p:nvSpPr>
+        <p:spPr>
+          <a:xfrm>
+            <a:off x="7123841" y="5707493"/>
+            <a:ext cx="328936" cy="432554"/>
+          </a:xfrm>
+          <a:prstGeom prst="rect">
+            <a:avLst/>
+          </a:prstGeom>
+          <a:noFill/>
+        </p:spPr>
+        <p:txBody>
+          <a:bodyPr wrap="none" rtlCol="0">
+            <a:spAutoFit/>
+          </a:bodyPr>
+          <a:lstStyle/>
+          <a:p>
+            <a:r>
+              <a:rPr lang="en-US" b="1" dirty="0" smtClean="0">
+                <a:solidFill>
+                  <a:srgbClr val="FF0000"/>
+                </a:solidFill>
+                <a:effectLst>
+                  <a:outerShdw blurRad="38100" dist="38100" dir="2700000" algn="tl">
+                    <a:srgbClr val="000000">
+                      <a:alpha val="43137"/>
+                    </a:srgbClr>
+                  </a:outerShdw>
+                </a:effectLst>
+              </a:rPr>
+              <a:t>5</a:t>
+            </a:r>
+            <a:endParaRPr lang="en-AU" b="1" dirty="0">
+              <a:solidFill>
+                <a:srgbClr val="FF0000"/>
+              </a:solidFill>
+              <a:effectLst>
+                <a:outerShdw blurRad="38100" dist="38100" dir="2700000" algn="tl">
+                  <a:srgbClr val="000000">
+                    <a:alpha val="43137"/>
+                  </a:srgbClr>
+                </a:outerShdw>
+              </a:effectLst>
+            </a:endParaRPr>
+          </a:p>
+        </p:txBody>
+      </p:sp>
+      <p:sp>
+        <p:nvSpPr>
+          <p:cNvPr id="104" name="TextBox 103"/>
+          <p:cNvSpPr txBox="1"/>
+          <p:nvPr/>
+        </p:nvSpPr>
+        <p:spPr>
+          <a:xfrm>
+            <a:off x="11169050" y="5685068"/>
+            <a:ext cx="328936" cy="432554"/>
+          </a:xfrm>
+          <a:prstGeom prst="rect">
+            <a:avLst/>
+          </a:prstGeom>
+          <a:noFill/>
+        </p:spPr>
+        <p:txBody>
+          <a:bodyPr wrap="none" rtlCol="0">
+            <a:spAutoFit/>
+          </a:bodyPr>
+          <a:lstStyle/>
+          <a:p>
+            <a:r>
+              <a:rPr lang="en-US" b="1" dirty="0" smtClean="0">
+                <a:solidFill>
+                  <a:srgbClr val="FF0000"/>
+                </a:solidFill>
+                <a:effectLst>
+                  <a:outerShdw blurRad="38100" dist="38100" dir="2700000" algn="tl">
+                    <a:srgbClr val="000000">
+                      <a:alpha val="43137"/>
+                    </a:srgbClr>
+                  </a:outerShdw>
+                </a:effectLst>
+              </a:rPr>
+              <a:t>6</a:t>
+            </a:r>
+            <a:endParaRPr lang="en-AU" b="1" dirty="0">
+              <a:solidFill>
+                <a:srgbClr val="FF0000"/>
+              </a:solidFill>
+              <a:effectLst>
+                <a:outerShdw blurRad="38100" dist="38100" dir="2700000" algn="tl">
+                  <a:srgbClr val="000000">
+                    <a:alpha val="43137"/>
+                  </a:srgbClr>
+                </a:outerShdw>
+              </a:effectLst>
+            </a:endParaRPr>
+          </a:p>
+        </p:txBody>
+      </p:sp>
+      <p:sp>
+        <p:nvSpPr>
+          <p:cNvPr id="105" name="Rectangle 104"/>
+          <p:cNvSpPr/>
+          <p:nvPr/>
+        </p:nvSpPr>
+        <p:spPr>
+          <a:xfrm>
+            <a:off x="4568009" y="2428096"/>
+            <a:ext cx="945209" cy="269841"/>
+          </a:xfrm>
+          <a:prstGeom prst="rect">
+            <a:avLst/>
+          </a:prstGeom>
+          <a:solidFill>
+            <a:schemeClr val="accent1">
+              <a:lumMod val="20000"/>
+              <a:lumOff val="80000"/>
+            </a:schemeClr>
+          </a:solidFill>
+        </p:spPr>
+        <p:style>
+          <a:lnRef idx="2">
+            <a:schemeClr val="accent1">
+              <a:shade val="50000"/>
+            </a:schemeClr>
+          </a:lnRef>
+          <a:fillRef idx="1">
+            <a:schemeClr val="accent1"/>
+          </a:fillRef>
+          <a:effectRef idx="0">
+            <a:schemeClr val="accent1"/>
+          </a:effectRef>
+          <a:fontRef idx="minor">
+            <a:schemeClr val="lt1"/>
+          </a:fontRef>
+        </p:style>
+        <p:txBody>
+          <a:bodyPr rtlCol="0" anchor="ctr"/>
+          <a:lstStyle/>
+          <a:p>
+            <a:pPr marL="171450" indent="-171450">
+              <a:buFont typeface="Arial" panose="020B0604020202020204" pitchFamily="34" charset="0"/>
+              <a:buChar char="•"/>
+            </a:pPr>
+            <a:r>
+              <a:rPr lang="en-US" sz="1200" dirty="0" smtClean="0">
+                <a:solidFill>
+                  <a:schemeClr val="tx1"/>
+                </a:solidFill>
+              </a:rPr>
+              <a:t>Answers</a:t>
+            </a:r>
+            <a:endParaRPr lang="en-AU" sz="1200" dirty="0">
+              <a:solidFill>
+                <a:schemeClr val="tx1"/>
+              </a:solidFill>
+            </a:endParaRPr>
+          </a:p>
+        </p:txBody>
+      </p:sp>
+      <p:sp>
+        <p:nvSpPr>
+          <p:cNvPr id="106" name="TextBox 105"/>
+          <p:cNvSpPr txBox="1"/>
+          <p:nvPr/>
+        </p:nvSpPr>
+        <p:spPr>
+          <a:xfrm>
+            <a:off x="481678" y="1690785"/>
+            <a:ext cx="474810" cy="276999"/>
+          </a:xfrm>
+          <a:prstGeom prst="rect">
+            <a:avLst/>
+          </a:prstGeom>
+          <a:noFill/>
+        </p:spPr>
+        <p:txBody>
+          <a:bodyPr wrap="none" rtlCol="0">
+            <a:spAutoFit/>
+          </a:bodyPr>
+          <a:lstStyle/>
+          <a:p>
+            <a:r>
+              <a:rPr lang="en-US" sz="1200" dirty="0" smtClean="0"/>
+              <a:t>User</a:t>
+            </a:r>
+            <a:endParaRPr lang="en-AU" sz="1200" dirty="0"/>
+          </a:p>
+        </p:txBody>
+      </p:sp>
+    </p:spTree>
+    <p:extLst>
+      <p:ext uri="{BB962C8B-B14F-4D97-AF65-F5344CB8AC3E}">
+        <p14:creationId xmlns:p14="http://schemas.microsoft.com/office/powerpoint/2010/main" val="790264067"/>
+      </p:ext>
+    </p:extLst>
+  </p:cSld>
+  <p:clrMapOvr>
+    <a:masterClrMapping/>
+  </p:clrMapOvr>
+  <p:timing>
+    <p:tnLst>
+      <p:par>
+        <p:cTn id="1" dur="indefinite" restart="never" nodeType="tmRoot"/>
+      </p:par>
+    </p:tnLst>
+  </p:timing>
 </p:sld>
 </file>
 
